--- a/docs/artifacts/presentation_v2.pptx
+++ b/docs/artifacts/presentation_v2.pptx
@@ -11,6 +11,9 @@
     <p:sldId id="259" r:id="rId10"/>
     <p:sldId id="260" r:id="rId11"/>
     <p:sldId id="261" r:id="rId12"/>
+    <p:sldId id="262" r:id="rId13"/>
+    <p:sldId id="263" r:id="rId14"/>
+    <p:sldId id="264" r:id="rId15"/>
   </p:sldIdLst>
   <p:sldSz cx="12191695" cy="6858000" type="screen4x3"/>
   <p:notesSz cx="6858000" cy="9144000"/>
@@ -3108,7 +3111,7 @@
             <a:avLst/>
           </a:prstGeom>
           <a:solidFill>
-            <a:srgbClr val="0F172A"/>
+            <a:srgbClr val="F5F5F7"/>
           </a:solidFill>
           <a:ln>
             <a:noFill/>
@@ -3144,8 +3147,8 @@
         </p:nvSpPr>
         <p:spPr>
           <a:xfrm>
-            <a:off x="914400" y="1828800"/>
-            <a:ext cx="10332720" cy="3200400"/>
+            <a:off x="914400" y="2011680"/>
+            <a:ext cx="10362895" cy="3200400"/>
           </a:xfrm>
           <a:prstGeom prst="rect">
             <a:avLst/>
@@ -3159,26 +3162,31 @@
           <a:lstStyle/>
           <a:p>
             <a:pPr>
-              <a:defRPr sz="4400" b="1">
-                <a:solidFill>
-                  <a:srgbClr val="38BDF8"/>
-                </a:solidFill>
+              <a:defRPr sz="4000" b="1">
+                <a:solidFill>
+                  <a:srgbClr val="0071E3"/>
+                </a:solidFill>
+                <a:latin typeface="Helvetica Neue"/>
               </a:defRPr>
             </a:pPr>
             <a:r>
-              <a:t>THz-Unified-Optimizer</a:t>
+              <a:t>Развитие физической модели ТГц поляризатора</a:t>
             </a:r>
           </a:p>
           <a:p>
             <a:pPr>
-              <a:defRPr sz="2800">
-                <a:solidFill>
-                  <a:srgbClr val="818CF8"/>
-                </a:solidFill>
+              <a:spcBef>
+                <a:spcPts val="1000"/>
+              </a:spcBef>
+              <a:defRPr sz="2400">
+                <a:solidFill>
+                  <a:srgbClr val="1D1D1F"/>
+                </a:solidFill>
+                <a:latin typeface="Helvetica Neue"/>
               </a:defRPr>
             </a:pPr>
             <a:r>
-              <a:t>Результаты недели (14 – 21 июля 2026)</a:t>
+              <a:t>Учёт фазовых эффектов, проводимости Друде и закономерности Deff</a:t>
             </a:r>
           </a:p>
           <a:p>
@@ -3186,29 +3194,13 @@
             <a:pPr>
               <a:defRPr sz="1600">
                 <a:solidFill>
-                  <a:srgbClr val="F8FAFC"/>
-                </a:solidFill>
+                  <a:srgbClr val="86868B"/>
+                </a:solidFill>
+                <a:latin typeface="Helvetica Neue"/>
               </a:defRPr>
             </a:pPr>
             <a:r>
-              <a:t>Прецизионное физико-статистическое моделирование проволочных решеток (WGP),</a:t>
-            </a:r>
-            <a:br/>
-            <a:r>
-              <a:t>анализ невязок, мультистартовая оптимизация и валидация на образце 40/20 мкм.</a:t>
-            </a:r>
-          </a:p>
-          <a:p>
-            <a:br/>
-            <a:pPr>
-              <a:defRPr sz="1400">
-                <a:solidFill>
-                  <a:srgbClr val="94A3B8"/>
-                </a:solidFill>
-              </a:defRPr>
-            </a:pPr>
-            <a:r>
-              <a:t>Автор: Antigravity IDE | Лаборатория ТГц спектроскопии</a:t>
+              <a:t>Докладчик: Попов Дмитрий | Анализ терагерцовой спектроскопии (THz-TDS)</a:t>
             </a:r>
           </a:p>
         </p:txBody>
@@ -3246,7 +3238,7 @@
             <a:avLst/>
           </a:prstGeom>
           <a:solidFill>
-            <a:srgbClr val="0F172A"/>
+            <a:srgbClr val="F5F5F7"/>
           </a:solidFill>
           <a:ln>
             <a:noFill/>
@@ -3282,8 +3274,8 @@
         </p:nvSpPr>
         <p:spPr>
           <a:xfrm>
-            <a:off x="731520" y="365760"/>
-            <a:ext cx="10698480" cy="1005840"/>
+            <a:off x="548640" y="365760"/>
+            <a:ext cx="10972800" cy="914400"/>
           </a:xfrm>
           <a:prstGeom prst="rect">
             <a:avLst/>
@@ -3297,296 +3289,175 @@
           <a:lstStyle/>
           <a:p>
             <a:pPr>
-              <a:defRPr sz="2800" b="1">
-                <a:solidFill>
-                  <a:srgbClr val="38BDF8"/>
-                </a:solidFill>
-                <a:latin typeface="Segoe UI"/>
+              <a:defRPr sz="2600" b="1">
+                <a:solidFill>
+                  <a:srgbClr val="0071E3"/>
+                </a:solidFill>
+                <a:latin typeface="Helvetica Neue"/>
               </a:defRPr>
             </a:pPr>
             <a:r>
-              <a:t>🎯 Главные вехи и достижения недели</a:t>
+              <a:t>Конструкция и развитие физической модели</a:t>
             </a:r>
           </a:p>
           <a:p>
             <a:pPr>
-              <a:defRPr sz="1400">
-                <a:solidFill>
-                  <a:srgbClr val="94A3B8"/>
-                </a:solidFill>
-                <a:latin typeface="Segoe UI"/>
+              <a:defRPr sz="1300">
+                <a:solidFill>
+                  <a:srgbClr val="86868B"/>
+                </a:solidFill>
+                <a:latin typeface="Helvetica Neue"/>
               </a:defRPr>
             </a:pPr>
             <a:r>
-              <a:t>THz-Unified-Optimizer | Еженедельный отчёт</a:t>
-            </a:r>
-          </a:p>
-        </p:txBody>
-      </p:sp>
-      <p:sp>
-        <p:nvSpPr>
-          <p:cNvPr id="4" name="Rounded Rectangle 3"/>
-          <p:cNvSpPr/>
+              <a:t>Аттенюатор ATT-11-16-CA85 и эволюция параметров</a:t>
+            </a:r>
+          </a:p>
+        </p:txBody>
+      </p:sp>
+      <p:sp>
+        <p:nvSpPr>
+          <p:cNvPr id="4" name="TextBox 3"/>
+          <p:cNvSpPr txBox="1"/>
           <p:nvPr/>
         </p:nvSpPr>
         <p:spPr>
           <a:xfrm>
-            <a:off x="731520" y="1463040"/>
-            <a:ext cx="10728655" cy="1005840"/>
+            <a:off x="548640" y="1371600"/>
+            <a:ext cx="5303520" cy="4937760"/>
           </a:xfrm>
-          <a:prstGeom prst="roundRect">
+          <a:prstGeom prst="rect">
             <a:avLst/>
           </a:prstGeom>
-          <a:solidFill>
-            <a:srgbClr val="1E293B"/>
-          </a:solidFill>
-          <a:ln>
-            <a:solidFill>
-              <a:srgbClr val="818CF8"/>
-            </a:solidFill>
-          </a:ln>
+          <a:noFill/>
         </p:spPr>
-        <p:style>
-          <a:lnRef idx="1">
-            <a:schemeClr val="accent1"/>
-          </a:lnRef>
-          <a:fillRef idx="3">
-            <a:schemeClr val="accent1"/>
-          </a:fillRef>
-          <a:effectRef idx="2">
-            <a:schemeClr val="accent1"/>
-          </a:effectRef>
-          <a:fontRef idx="minor">
-            <a:schemeClr val="lt1"/>
-          </a:fontRef>
-        </p:style>
-        <p:txBody>
-          <a:bodyPr rtlCol="0" anchor="ctr" wrap="square"/>
-          <a:lstStyle/>
-          <a:p>
-            <a:pPr algn="ctr">
-              <a:defRPr sz="1800" b="1">
-                <a:solidFill>
-                  <a:srgbClr val="38BDF8"/>
-                </a:solidFill>
+        <p:txBody>
+          <a:bodyPr wrap="square">
+            <a:spAutoFit/>
+          </a:bodyPr>
+          <a:lstStyle/>
+          <a:p>
+            <a:pPr>
+              <a:spcAft>
+                <a:spcPts val="1200"/>
+              </a:spcAft>
+              <a:defRPr sz="1500">
+                <a:solidFill>
+                  <a:srgbClr val="1D1D1F"/>
+                </a:solidFill>
+                <a:latin typeface="Helvetica Neue"/>
               </a:defRPr>
             </a:pPr>
             <a:r>
-              <a:t>1. Физическая эволюция модели</a:t>
+              <a:t>• Устройство: Аттенюатор ATT-11-16-CA85 содержит два проволочных поляризатора P1 (вращается) и P2 (зафиксирован).</a:t>
             </a:r>
           </a:p>
           <a:p>
             <a:pPr>
-              <a:defRPr sz="1300">
-                <a:solidFill>
-                  <a:srgbClr val="F8FAFC"/>
-                </a:solidFill>
+              <a:spcAft>
+                <a:spcPts val="1200"/>
+              </a:spcAft>
+              <a:defRPr sz="1500">
+                <a:solidFill>
+                  <a:srgbClr val="1D1D1F"/>
+                </a:solidFill>
+                <a:latin typeface="Helvetica Neue"/>
               </a:defRPr>
             </a:pPr>
             <a:r>
-              <a:t>Переход от Pure Blanco к комплексной Jones-матрице с учетом поверхностного импеданса Друде (вольфрам), рассеяния e^(-α ν^γ) и фазовой задержки τ_par.</a:t>
-            </a:r>
-          </a:p>
-        </p:txBody>
-      </p:sp>
-      <p:sp>
-        <p:nvSpPr>
-          <p:cNvPr id="5" name="Rounded Rectangle 4"/>
-          <p:cNvSpPr/>
+              <a:t>• Итог прошлой недели: 6-параметрическая модель (θ_offset = 1.43°, ε_floor = 6.38·10⁻⁵) дала метрологическую погрешность 0.29 дБ.</a:t>
+            </a:r>
+          </a:p>
+          <a:p>
+            <a:pPr>
+              <a:spcAft>
+                <a:spcPts val="1200"/>
+              </a:spcAft>
+              <a:defRPr sz="1500">
+                <a:solidFill>
+                  <a:srgbClr val="1D1D1F"/>
+                </a:solidFill>
+                <a:latin typeface="Helvetica Neue"/>
+              </a:defRPr>
+            </a:pPr>
+            <a:r>
+              <a:t>• Развитие этой недели:</a:t>
+            </a:r>
+          </a:p>
+          <a:p>
+            <a:pPr>
+              <a:spcAft>
+                <a:spcPts val="1200"/>
+              </a:spcAft>
+              <a:defRPr sz="1500">
+                <a:solidFill>
+                  <a:srgbClr val="1D1D1F"/>
+                </a:solidFill>
+                <a:latin typeface="Helvetica Neue"/>
+              </a:defRPr>
+            </a:pPr>
+            <a:r>
+              <a:t>   - Внедрён импеданс Друде для вольфрамовых нитей.</a:t>
+            </a:r>
+          </a:p>
+          <a:p>
+            <a:pPr>
+              <a:spcAft>
+                <a:spcPts val="1200"/>
+              </a:spcAft>
+              <a:defRPr sz="1500">
+                <a:solidFill>
+                  <a:srgbClr val="1D1D1F"/>
+                </a:solidFill>
+                <a:latin typeface="Helvetica Neue"/>
+              </a:defRPr>
+            </a:pPr>
+            <a:r>
+              <a:t>   - Открыт эффект фазовой анизотропии τ_par при скрещивании.</a:t>
+            </a:r>
+          </a:p>
+          <a:p>
+            <a:pPr>
+              <a:spcAft>
+                <a:spcPts val="1200"/>
+              </a:spcAft>
+              <a:defRPr sz="1500">
+                <a:solidFill>
+                  <a:srgbClr val="1D1D1F"/>
+                </a:solidFill>
+                <a:latin typeface="Helvetica Neue"/>
+              </a:defRPr>
+            </a:pPr>
+            <a:r>
+              <a:t>   - Модель проверена на новом образце 40/20 мкм.</a:t>
+            </a:r>
+          </a:p>
+        </p:txBody>
+      </p:sp>
+      <p:pic>
+        <p:nvPicPr>
+          <p:cNvPr id="5" name="Picture 4" descr="optim_stage3_hw.png"/>
+          <p:cNvPicPr>
+            <a:picLocks noChangeAspect="1"/>
+          </p:cNvPicPr>
           <p:nvPr/>
-        </p:nvSpPr>
+        </p:nvPicPr>
+        <p:blipFill>
+          <a:blip r:embed="rId2"/>
+          <a:stretch>
+            <a:fillRect/>
+          </a:stretch>
+        </p:blipFill>
         <p:spPr>
           <a:xfrm>
-            <a:off x="731520" y="2651760"/>
-            <a:ext cx="10728655" cy="1005840"/>
+            <a:off x="6035040" y="1371600"/>
+            <a:ext cx="6223533" cy="4937760"/>
           </a:xfrm>
-          <a:prstGeom prst="roundRect">
+          <a:prstGeom prst="rect">
             <a:avLst/>
           </a:prstGeom>
-          <a:solidFill>
-            <a:srgbClr val="1E293B"/>
-          </a:solidFill>
-          <a:ln>
-            <a:solidFill>
-              <a:srgbClr val="818CF8"/>
-            </a:solidFill>
-          </a:ln>
         </p:spPr>
-        <p:style>
-          <a:lnRef idx="1">
-            <a:schemeClr val="accent1"/>
-          </a:lnRef>
-          <a:fillRef idx="3">
-            <a:schemeClr val="accent1"/>
-          </a:fillRef>
-          <a:effectRef idx="2">
-            <a:schemeClr val="accent1"/>
-          </a:effectRef>
-          <a:fontRef idx="minor">
-            <a:schemeClr val="lt1"/>
-          </a:fontRef>
-        </p:style>
-        <p:txBody>
-          <a:bodyPr rtlCol="0" anchor="ctr" wrap="square"/>
-          <a:lstStyle/>
-          <a:p>
-            <a:pPr algn="ctr">
-              <a:defRPr sz="1800" b="1">
-                <a:solidFill>
-                  <a:srgbClr val="38BDF8"/>
-                </a:solidFill>
-              </a:defRPr>
-            </a:pPr>
-            <a:r>
-              <a:t>2. Статистический анализ &amp; LMFIT</a:t>
-            </a:r>
-          </a:p>
-          <a:p>
-            <a:pPr>
-              <a:defRPr sz="1300">
-                <a:solidFill>
-                  <a:srgbClr val="F8FAFC"/>
-                </a:solidFill>
-              </a:defRPr>
-            </a:pPr>
-            <a:r>
-              <a:t>Построение матриц ковариации, доверительных интервалов (C(P,D) = -0.9991) и статистический доказательный анализ через Ablation Study (AIC/BIC).</a:t>
-            </a:r>
-          </a:p>
-        </p:txBody>
-      </p:sp>
-      <p:sp>
-        <p:nvSpPr>
-          <p:cNvPr id="6" name="Rounded Rectangle 5"/>
-          <p:cNvSpPr/>
-          <p:nvPr/>
-        </p:nvSpPr>
-        <p:spPr>
-          <a:xfrm>
-            <a:off x="731520" y="3840480"/>
-            <a:ext cx="10728655" cy="1005840"/>
-          </a:xfrm>
-          <a:prstGeom prst="roundRect">
-            <a:avLst/>
-          </a:prstGeom>
-          <a:solidFill>
-            <a:srgbClr val="1E293B"/>
-          </a:solidFill>
-          <a:ln>
-            <a:solidFill>
-              <a:srgbClr val="818CF8"/>
-            </a:solidFill>
-          </a:ln>
-        </p:spPr>
-        <p:style>
-          <a:lnRef idx="1">
-            <a:schemeClr val="accent1"/>
-          </a:lnRef>
-          <a:fillRef idx="3">
-            <a:schemeClr val="accent1"/>
-          </a:fillRef>
-          <a:effectRef idx="2">
-            <a:schemeClr val="accent1"/>
-          </a:effectRef>
-          <a:fontRef idx="minor">
-            <a:schemeClr val="lt1"/>
-          </a:fontRef>
-        </p:style>
-        <p:txBody>
-          <a:bodyPr rtlCol="0" anchor="ctr" wrap="square"/>
-          <a:lstStyle/>
-          <a:p>
-            <a:pPr algn="ctr">
-              <a:defRPr sz="1800" b="1">
-                <a:solidFill>
-                  <a:srgbClr val="38BDF8"/>
-                </a:solidFill>
-              </a:defRPr>
-            </a:pPr>
-            <a:r>
-              <a:t>3. Анализ невязок (AGENTS Rule #5)</a:t>
-            </a:r>
-          </a:p>
-          <a:p>
-            <a:pPr>
-              <a:defRPr sz="1300">
-                <a:solidFill>
-                  <a:srgbClr val="F8FAFC"/>
-                </a:solidFill>
-              </a:defRPr>
-            </a:pPr>
-            <a:r>
-              <a:t>Подтверждение ненормальности остатков (Shapiro-Wilk) и 85% кросс-серийной корреляции при скользящих углах 50°–90° (апертурная дифракция).</a:t>
-            </a:r>
-          </a:p>
-        </p:txBody>
-      </p:sp>
-      <p:sp>
-        <p:nvSpPr>
-          <p:cNvPr id="7" name="Rounded Rectangle 6"/>
-          <p:cNvSpPr/>
-          <p:nvPr/>
-        </p:nvSpPr>
-        <p:spPr>
-          <a:xfrm>
-            <a:off x="731520" y="5029200"/>
-            <a:ext cx="10728655" cy="1005840"/>
-          </a:xfrm>
-          <a:prstGeom prst="roundRect">
-            <a:avLst/>
-          </a:prstGeom>
-          <a:solidFill>
-            <a:srgbClr val="1E293B"/>
-          </a:solidFill>
-          <a:ln>
-            <a:solidFill>
-              <a:srgbClr val="818CF8"/>
-            </a:solidFill>
-          </a:ln>
-        </p:spPr>
-        <p:style>
-          <a:lnRef idx="1">
-            <a:schemeClr val="accent1"/>
-          </a:lnRef>
-          <a:fillRef idx="3">
-            <a:schemeClr val="accent1"/>
-          </a:fillRef>
-          <a:effectRef idx="2">
-            <a:schemeClr val="accent1"/>
-          </a:effectRef>
-          <a:fontRef idx="minor">
-            <a:schemeClr val="lt1"/>
-          </a:fontRef>
-        </p:style>
-        <p:txBody>
-          <a:bodyPr rtlCol="0" anchor="ctr" wrap="square"/>
-          <a:lstStyle/>
-          <a:p>
-            <a:pPr algn="ctr">
-              <a:defRPr sz="1800" b="1">
-                <a:solidFill>
-                  <a:srgbClr val="38BDF8"/>
-                </a:solidFill>
-              </a:defRPr>
-            </a:pPr>
-            <a:r>
-              <a:t>4. Эксперимент на решетке 40/20 мкм</a:t>
-            </a:r>
-          </a:p>
-          <a:p>
-            <a:pPr>
-              <a:defRPr sz="1300">
-                <a:solidFill>
-                  <a:srgbClr val="F8FAFC"/>
-                </a:solidFill>
-              </a:defRPr>
-            </a:pPr>
-            <a:r>
-              <a:t>Измерение серий grid_40_20, подтверждение закона масштабирования Deff = Dphys * (1 - 0.85 * D/P) и снижение χ²_ν до 0.00310.</a:t>
-            </a:r>
-          </a:p>
-        </p:txBody>
-      </p:sp>
+      </p:pic>
     </p:spTree>
   </p:cSld>
   <p:clrMapOvr>
@@ -3620,7 +3491,7 @@
             <a:avLst/>
           </a:prstGeom>
           <a:solidFill>
-            <a:srgbClr val="0F172A"/>
+            <a:srgbClr val="F5F5F7"/>
           </a:solidFill>
           <a:ln>
             <a:noFill/>
@@ -3656,8 +3527,8 @@
         </p:nvSpPr>
         <p:spPr>
           <a:xfrm>
-            <a:off x="731520" y="365760"/>
-            <a:ext cx="10698480" cy="1005840"/>
+            <a:off x="548640" y="365760"/>
+            <a:ext cx="10972800" cy="914400"/>
           </a:xfrm>
           <a:prstGeom prst="rect">
             <a:avLst/>
@@ -3671,762 +3542,119 @@
           <a:lstStyle/>
           <a:p>
             <a:pPr>
-              <a:defRPr sz="2800" b="1">
-                <a:solidFill>
-                  <a:srgbClr val="38BDF8"/>
-                </a:solidFill>
-                <a:latin typeface="Segoe UI"/>
+              <a:defRPr sz="2600" b="1">
+                <a:solidFill>
+                  <a:srgbClr val="0071E3"/>
+                </a:solidFill>
+                <a:latin typeface="Helvetica Neue"/>
               </a:defRPr>
             </a:pPr>
             <a:r>
-              <a:t>📈 Модельный Ablation Study (Сравнение AIC/BIC)</a:t>
+              <a:t>Спектральное описание: потери Друде и рассеяние</a:t>
             </a:r>
           </a:p>
           <a:p>
             <a:pPr>
-              <a:defRPr sz="1400">
-                <a:solidFill>
-                  <a:srgbClr val="94A3B8"/>
-                </a:solidFill>
-                <a:latin typeface="Segoe UI"/>
+              <a:defRPr sz="1300">
+                <a:solidFill>
+                  <a:srgbClr val="86868B"/>
+                </a:solidFill>
+                <a:latin typeface="Helvetica Neue"/>
               </a:defRPr>
             </a:pPr>
             <a:r>
-              <a:t>THz-Unified-Optimizer | Еженедельный отчёт</a:t>
-            </a:r>
-          </a:p>
-        </p:txBody>
-      </p:sp>
-      <p:graphicFrame>
-        <p:nvGraphicFramePr>
-          <p:cNvPr id="4" name="Table 3"/>
-          <p:cNvGraphicFramePr>
-            <a:graphicFrameLocks noGrp="1"/>
-          </p:cNvGraphicFramePr>
+              <a:t>Устранение завышения спектра при углах 50°–70°</a:t>
+            </a:r>
+          </a:p>
+        </p:txBody>
+      </p:sp>
+      <p:sp>
+        <p:nvSpPr>
+          <p:cNvPr id="4" name="TextBox 3"/>
+          <p:cNvSpPr txBox="1"/>
           <p:nvPr/>
-        </p:nvGraphicFramePr>
-        <p:xfrm>
-          <a:off x="731520" y="1645920"/>
-          <a:ext cx="6217920" cy="4114800"/>
-        </p:xfrm>
-        <a:graphic>
-          <a:graphicData uri="http://schemas.openxmlformats.org/drawingml/2006/table">
-            <a:tbl>
-              <a:tblPr firstRow="1" bandRow="1">
-                <a:tableStyleId>{5C22544A-7EE6-4342-B048-85BDC9FD1C3A}</a:tableStyleId>
-              </a:tblPr>
-              <a:tblGrid>
-                <a:gridCol w="1036320"/>
-                <a:gridCol w="1036320"/>
-                <a:gridCol w="1036320"/>
-                <a:gridCol w="1036320"/>
-                <a:gridCol w="1036320"/>
-                <a:gridCol w="1036320"/>
-              </a:tblGrid>
-              <a:tr h="822960">
-                <a:tc>
-                  <a:txBody>
-                    <a:bodyPr/>
-                    <a:lstStyle/>
-                    <a:p>
-                      <a:pPr>
-                        <a:defRPr b="1" sz="1200">
-                          <a:solidFill>
-                            <a:srgbClr val="38BDF8"/>
-                          </a:solidFill>
-                        </a:defRPr>
-                      </a:pPr>
-                      <a:r>
-                        <a:t>Модель</a:t>
-                      </a:r>
-                    </a:p>
-                  </a:txBody>
-                  <a:tcPr>
-                    <a:solidFill>
-                      <a:srgbClr val="1E293B"/>
-                    </a:solidFill>
-                  </a:tcPr>
-                </a:tc>
-                <a:tc>
-                  <a:txBody>
-                    <a:bodyPr/>
-                    <a:lstStyle/>
-                    <a:p>
-                      <a:pPr>
-                        <a:defRPr b="1" sz="1200">
-                          <a:solidFill>
-                            <a:srgbClr val="38BDF8"/>
-                          </a:solidFill>
-                        </a:defRPr>
-                      </a:pPr>
-                      <a:r>
-                        <a:t>D_eff (мкм)</a:t>
-                      </a:r>
-                    </a:p>
-                  </a:txBody>
-                  <a:tcPr>
-                    <a:solidFill>
-                      <a:srgbClr val="1E293B"/>
-                    </a:solidFill>
-                  </a:tcPr>
-                </a:tc>
-                <a:tc>
-                  <a:txBody>
-                    <a:bodyPr/>
-                    <a:lstStyle/>
-                    <a:p>
-                      <a:pPr>
-                        <a:defRPr b="1" sz="1200">
-                          <a:solidFill>
-                            <a:srgbClr val="38BDF8"/>
-                          </a:solidFill>
-                        </a:defRPr>
-                      </a:pPr>
-                      <a:r>
-                        <a:t>χ²_ν</a:t>
-                      </a:r>
-                    </a:p>
-                  </a:txBody>
-                  <a:tcPr>
-                    <a:solidFill>
-                      <a:srgbClr val="1E293B"/>
-                    </a:solidFill>
-                  </a:tcPr>
-                </a:tc>
-                <a:tc>
-                  <a:txBody>
-                    <a:bodyPr/>
-                    <a:lstStyle/>
-                    <a:p>
-                      <a:pPr>
-                        <a:defRPr b="1" sz="1200">
-                          <a:solidFill>
-                            <a:srgbClr val="38BDF8"/>
-                          </a:solidFill>
-                        </a:defRPr>
-                      </a:pPr>
-                      <a:r>
-                        <a:t>RMSE (дБ)</a:t>
-                      </a:r>
-                    </a:p>
-                  </a:txBody>
-                  <a:tcPr>
-                    <a:solidFill>
-                      <a:srgbClr val="1E293B"/>
-                    </a:solidFill>
-                  </a:tcPr>
-                </a:tc>
-                <a:tc>
-                  <a:txBody>
-                    <a:bodyPr/>
-                    <a:lstStyle/>
-                    <a:p>
-                      <a:pPr>
-                        <a:defRPr b="1" sz="1200">
-                          <a:solidFill>
-                            <a:srgbClr val="38BDF8"/>
-                          </a:solidFill>
-                        </a:defRPr>
-                      </a:pPr>
-                      <a:r>
-                        <a:t>AIC</a:t>
-                      </a:r>
-                    </a:p>
-                  </a:txBody>
-                  <a:tcPr>
-                    <a:solidFill>
-                      <a:srgbClr val="1E293B"/>
-                    </a:solidFill>
-                  </a:tcPr>
-                </a:tc>
-                <a:tc>
-                  <a:txBody>
-                    <a:bodyPr/>
-                    <a:lstStyle/>
-                    <a:p>
-                      <a:pPr>
-                        <a:defRPr b="1" sz="1200">
-                          <a:solidFill>
-                            <a:srgbClr val="38BDF8"/>
-                          </a:solidFill>
-                        </a:defRPr>
-                      </a:pPr>
-                      <a:r>
-                        <a:t>ΔAIC</a:t>
-                      </a:r>
-                    </a:p>
-                  </a:txBody>
-                  <a:tcPr>
-                    <a:solidFill>
-                      <a:srgbClr val="1E293B"/>
-                    </a:solidFill>
-                  </a:tcPr>
-                </a:tc>
-              </a:tr>
-              <a:tr h="822960">
-                <a:tc>
-                  <a:txBody>
-                    <a:bodyPr/>
-                    <a:lstStyle/>
-                    <a:p>
-                      <a:pPr>
-                        <a:defRPr sz="1100">
-                          <a:solidFill>
-                            <a:srgbClr val="F8FAFC"/>
-                          </a:solidFill>
-                        </a:defRPr>
-                      </a:pPr>
-                      <a:r>
-                        <a:t>M0: Blanco</a:t>
-                      </a:r>
-                    </a:p>
-                  </a:txBody>
-                  <a:tcPr>
-                    <a:solidFill>
-                      <a:srgbClr val="1E293B"/>
-                    </a:solidFill>
-                  </a:tcPr>
-                </a:tc>
-                <a:tc>
-                  <a:txBody>
-                    <a:bodyPr/>
-                    <a:lstStyle/>
-                    <a:p>
-                      <a:pPr>
-                        <a:defRPr sz="1100">
-                          <a:solidFill>
-                            <a:srgbClr val="F8FAFC"/>
-                          </a:solidFill>
-                        </a:defRPr>
-                      </a:pPr>
-                      <a:r>
-                        <a:t>4.614</a:t>
-                      </a:r>
-                    </a:p>
-                  </a:txBody>
-                  <a:tcPr>
-                    <a:solidFill>
-                      <a:srgbClr val="1E293B"/>
-                    </a:solidFill>
-                  </a:tcPr>
-                </a:tc>
-                <a:tc>
-                  <a:txBody>
-                    <a:bodyPr/>
-                    <a:lstStyle/>
-                    <a:p>
-                      <a:pPr>
-                        <a:defRPr sz="1100">
-                          <a:solidFill>
-                            <a:srgbClr val="F8FAFC"/>
-                          </a:solidFill>
-                        </a:defRPr>
-                      </a:pPr>
-                      <a:r>
-                        <a:t>0.00149</a:t>
-                      </a:r>
-                    </a:p>
-                  </a:txBody>
-                  <a:tcPr>
-                    <a:solidFill>
-                      <a:srgbClr val="1E293B"/>
-                    </a:solidFill>
-                  </a:tcPr>
-                </a:tc>
-                <a:tc>
-                  <a:txBody>
-                    <a:bodyPr/>
-                    <a:lstStyle/>
-                    <a:p>
-                      <a:pPr>
-                        <a:defRPr sz="1100">
-                          <a:solidFill>
-                            <a:srgbClr val="F8FAFC"/>
-                          </a:solidFill>
-                        </a:defRPr>
-                      </a:pPr>
-                      <a:r>
-                        <a:t>0.039</a:t>
-                      </a:r>
-                    </a:p>
-                  </a:txBody>
-                  <a:tcPr>
-                    <a:solidFill>
-                      <a:srgbClr val="1E293B"/>
-                    </a:solidFill>
-                  </a:tcPr>
-                </a:tc>
-                <a:tc>
-                  <a:txBody>
-                    <a:bodyPr/>
-                    <a:lstStyle/>
-                    <a:p>
-                      <a:pPr>
-                        <a:defRPr sz="1100">
-                          <a:solidFill>
-                            <a:srgbClr val="F8FAFC"/>
-                          </a:solidFill>
-                        </a:defRPr>
-                      </a:pPr>
-                      <a:r>
-                        <a:t>−19655.7</a:t>
-                      </a:r>
-                    </a:p>
-                  </a:txBody>
-                  <a:tcPr>
-                    <a:solidFill>
-                      <a:srgbClr val="1E293B"/>
-                    </a:solidFill>
-                  </a:tcPr>
-                </a:tc>
-                <a:tc>
-                  <a:txBody>
-                    <a:bodyPr/>
-                    <a:lstStyle/>
-                    <a:p>
-                      <a:pPr>
-                        <a:defRPr sz="1100">
-                          <a:solidFill>
-                            <a:srgbClr val="F8FAFC"/>
-                          </a:solidFill>
-                        </a:defRPr>
-                      </a:pPr>
-                      <a:r>
-                        <a:t>0.0</a:t>
-                      </a:r>
-                    </a:p>
-                  </a:txBody>
-                  <a:tcPr>
-                    <a:solidFill>
-                      <a:srgbClr val="1E293B"/>
-                    </a:solidFill>
-                  </a:tcPr>
-                </a:tc>
-              </a:tr>
-              <a:tr h="822960">
-                <a:tc>
-                  <a:txBody>
-                    <a:bodyPr/>
-                    <a:lstStyle/>
-                    <a:p>
-                      <a:pPr>
-                        <a:defRPr sz="1100">
-                          <a:solidFill>
-                            <a:srgbClr val="F8FAFC"/>
-                          </a:solidFill>
-                        </a:defRPr>
-                      </a:pPr>
-                      <a:r>
-                        <a:t>M1: +Drude</a:t>
-                      </a:r>
-                    </a:p>
-                  </a:txBody>
-                  <a:tcPr>
-                    <a:solidFill>
-                      <a:srgbClr val="1E293B"/>
-                    </a:solidFill>
-                  </a:tcPr>
-                </a:tc>
-                <a:tc>
-                  <a:txBody>
-                    <a:bodyPr/>
-                    <a:lstStyle/>
-                    <a:p>
-                      <a:pPr>
-                        <a:defRPr sz="1100">
-                          <a:solidFill>
-                            <a:srgbClr val="F8FAFC"/>
-                          </a:solidFill>
-                        </a:defRPr>
-                      </a:pPr>
-                      <a:r>
-                        <a:t>4.462</a:t>
-                      </a:r>
-                    </a:p>
-                  </a:txBody>
-                  <a:tcPr>
-                    <a:solidFill>
-                      <a:srgbClr val="1E293B"/>
-                    </a:solidFill>
-                  </a:tcPr>
-                </a:tc>
-                <a:tc>
-                  <a:txBody>
-                    <a:bodyPr/>
-                    <a:lstStyle/>
-                    <a:p>
-                      <a:pPr>
-                        <a:defRPr sz="1100">
-                          <a:solidFill>
-                            <a:srgbClr val="F8FAFC"/>
-                          </a:solidFill>
-                        </a:defRPr>
-                      </a:pPr>
-                      <a:r>
-                        <a:t>0.00178</a:t>
-                      </a:r>
-                    </a:p>
-                  </a:txBody>
-                  <a:tcPr>
-                    <a:solidFill>
-                      <a:srgbClr val="1E293B"/>
-                    </a:solidFill>
-                  </a:tcPr>
-                </a:tc>
-                <a:tc>
-                  <a:txBody>
-                    <a:bodyPr/>
-                    <a:lstStyle/>
-                    <a:p>
-                      <a:pPr>
-                        <a:defRPr sz="1100">
-                          <a:solidFill>
-                            <a:srgbClr val="F8FAFC"/>
-                          </a:solidFill>
-                        </a:defRPr>
-                      </a:pPr>
-                      <a:r>
-                        <a:t>0.042</a:t>
-                      </a:r>
-                    </a:p>
-                  </a:txBody>
-                  <a:tcPr>
-                    <a:solidFill>
-                      <a:srgbClr val="1E293B"/>
-                    </a:solidFill>
-                  </a:tcPr>
-                </a:tc>
-                <a:tc>
-                  <a:txBody>
-                    <a:bodyPr/>
-                    <a:lstStyle/>
-                    <a:p>
-                      <a:pPr>
-                        <a:defRPr sz="1100">
-                          <a:solidFill>
-                            <a:srgbClr val="F8FAFC"/>
-                          </a:solidFill>
-                        </a:defRPr>
-                      </a:pPr>
-                      <a:r>
-                        <a:t>−19116.0</a:t>
-                      </a:r>
-                    </a:p>
-                  </a:txBody>
-                  <a:tcPr>
-                    <a:solidFill>
-                      <a:srgbClr val="1E293B"/>
-                    </a:solidFill>
-                  </a:tcPr>
-                </a:tc>
-                <a:tc>
-                  <a:txBody>
-                    <a:bodyPr/>
-                    <a:lstStyle/>
-                    <a:p>
-                      <a:pPr>
-                        <a:defRPr sz="1100">
-                          <a:solidFill>
-                            <a:srgbClr val="F8FAFC"/>
-                          </a:solidFill>
-                        </a:defRPr>
-                      </a:pPr>
-                      <a:r>
-                        <a:t>+539.8 ❌</a:t>
-                      </a:r>
-                    </a:p>
-                  </a:txBody>
-                  <a:tcPr>
-                    <a:solidFill>
-                      <a:srgbClr val="1E293B"/>
-                    </a:solidFill>
-                  </a:tcPr>
-                </a:tc>
-              </a:tr>
-              <a:tr h="822960">
-                <a:tc>
-                  <a:txBody>
-                    <a:bodyPr/>
-                    <a:lstStyle/>
-                    <a:p>
-                      <a:pPr>
-                        <a:defRPr sz="1100">
-                          <a:solidFill>
-                            <a:srgbClr val="F8FAFC"/>
-                          </a:solidFill>
-                        </a:defRPr>
-                      </a:pPr>
-                      <a:r>
-                        <a:t>M2: +Scat (γ=2)</a:t>
-                      </a:r>
-                    </a:p>
-                  </a:txBody>
-                  <a:tcPr>
-                    <a:solidFill>
-                      <a:srgbClr val="1E293B"/>
-                    </a:solidFill>
-                  </a:tcPr>
-                </a:tc>
-                <a:tc>
-                  <a:txBody>
-                    <a:bodyPr/>
-                    <a:lstStyle/>
-                    <a:p>
-                      <a:pPr>
-                        <a:defRPr sz="1100">
-                          <a:solidFill>
-                            <a:srgbClr val="F8FAFC"/>
-                          </a:solidFill>
-                        </a:defRPr>
-                      </a:pPr>
-                      <a:r>
-                        <a:t>4.394</a:t>
-                      </a:r>
-                    </a:p>
-                  </a:txBody>
-                  <a:tcPr>
-                    <a:solidFill>
-                      <a:srgbClr val="1E293B"/>
-                    </a:solidFill>
-                  </a:tcPr>
-                </a:tc>
-                <a:tc>
-                  <a:txBody>
-                    <a:bodyPr/>
-                    <a:lstStyle/>
-                    <a:p>
-                      <a:pPr>
-                        <a:defRPr sz="1100">
-                          <a:solidFill>
-                            <a:srgbClr val="F8FAFC"/>
-                          </a:solidFill>
-                        </a:defRPr>
-                      </a:pPr>
-                      <a:r>
-                        <a:t>0.00157</a:t>
-                      </a:r>
-                    </a:p>
-                  </a:txBody>
-                  <a:tcPr>
-                    <a:solidFill>
-                      <a:srgbClr val="1E293B"/>
-                    </a:solidFill>
-                  </a:tcPr>
-                </a:tc>
-                <a:tc>
-                  <a:txBody>
-                    <a:bodyPr/>
-                    <a:lstStyle/>
-                    <a:p>
-                      <a:pPr>
-                        <a:defRPr sz="1100">
-                          <a:solidFill>
-                            <a:srgbClr val="F8FAFC"/>
-                          </a:solidFill>
-                        </a:defRPr>
-                      </a:pPr>
-                      <a:r>
-                        <a:t>0.040</a:t>
-                      </a:r>
-                    </a:p>
-                  </a:txBody>
-                  <a:tcPr>
-                    <a:solidFill>
-                      <a:srgbClr val="1E293B"/>
-                    </a:solidFill>
-                  </a:tcPr>
-                </a:tc>
-                <a:tc>
-                  <a:txBody>
-                    <a:bodyPr/>
-                    <a:lstStyle/>
-                    <a:p>
-                      <a:pPr>
-                        <a:defRPr sz="1100">
-                          <a:solidFill>
-                            <a:srgbClr val="F8FAFC"/>
-                          </a:solidFill>
-                        </a:defRPr>
-                      </a:pPr>
-                      <a:r>
-                        <a:t>−19491.2</a:t>
-                      </a:r>
-                    </a:p>
-                  </a:txBody>
-                  <a:tcPr>
-                    <a:solidFill>
-                      <a:srgbClr val="1E293B"/>
-                    </a:solidFill>
-                  </a:tcPr>
-                </a:tc>
-                <a:tc>
-                  <a:txBody>
-                    <a:bodyPr/>
-                    <a:lstStyle/>
-                    <a:p>
-                      <a:pPr>
-                        <a:defRPr sz="1100">
-                          <a:solidFill>
-                            <a:srgbClr val="F8FAFC"/>
-                          </a:solidFill>
-                        </a:defRPr>
-                      </a:pPr>
-                      <a:r>
-                        <a:t>−375.2 ✅</a:t>
-                      </a:r>
-                    </a:p>
-                  </a:txBody>
-                  <a:tcPr>
-                    <a:solidFill>
-                      <a:srgbClr val="1E293B"/>
-                    </a:solidFill>
-                  </a:tcPr>
-                </a:tc>
-              </a:tr>
-              <a:tr h="822960">
-                <a:tc>
-                  <a:txBody>
-                    <a:bodyPr/>
-                    <a:lstStyle/>
-                    <a:p>
-                      <a:pPr>
-                        <a:defRPr sz="1100">
-                          <a:solidFill>
-                            <a:srgbClr val="F8FAFC"/>
-                          </a:solidFill>
-                        </a:defRPr>
-                      </a:pPr>
-                      <a:r>
-                        <a:t>M3: +Scat (free γ)</a:t>
-                      </a:r>
-                    </a:p>
-                  </a:txBody>
-                  <a:tcPr>
-                    <a:solidFill>
-                      <a:srgbClr val="1E293B"/>
-                    </a:solidFill>
-                  </a:tcPr>
-                </a:tc>
-                <a:tc>
-                  <a:txBody>
-                    <a:bodyPr/>
-                    <a:lstStyle/>
-                    <a:p>
-                      <a:pPr>
-                        <a:defRPr sz="1100">
-                          <a:solidFill>
-                            <a:srgbClr val="F8FAFC"/>
-                          </a:solidFill>
-                        </a:defRPr>
-                      </a:pPr>
-                      <a:r>
-                        <a:t>4.384</a:t>
-                      </a:r>
-                    </a:p>
-                  </a:txBody>
-                  <a:tcPr>
-                    <a:solidFill>
-                      <a:srgbClr val="1E293B"/>
-                    </a:solidFill>
-                  </a:tcPr>
-                </a:tc>
-                <a:tc>
-                  <a:txBody>
-                    <a:bodyPr/>
-                    <a:lstStyle/>
-                    <a:p>
-                      <a:pPr>
-                        <a:defRPr sz="1100">
-                          <a:solidFill>
-                            <a:srgbClr val="F8FAFC"/>
-                          </a:solidFill>
-                        </a:defRPr>
-                      </a:pPr>
-                      <a:r>
-                        <a:t>0.00157</a:t>
-                      </a:r>
-                    </a:p>
-                  </a:txBody>
-                  <a:tcPr>
-                    <a:solidFill>
-                      <a:srgbClr val="1E293B"/>
-                    </a:solidFill>
-                  </a:tcPr>
-                </a:tc>
-                <a:tc>
-                  <a:txBody>
-                    <a:bodyPr/>
-                    <a:lstStyle/>
-                    <a:p>
-                      <a:pPr>
-                        <a:defRPr sz="1100">
-                          <a:solidFill>
-                            <a:srgbClr val="F8FAFC"/>
-                          </a:solidFill>
-                        </a:defRPr>
-                      </a:pPr>
-                      <a:r>
-                        <a:t>0.040</a:t>
-                      </a:r>
-                    </a:p>
-                  </a:txBody>
-                  <a:tcPr>
-                    <a:solidFill>
-                      <a:srgbClr val="1E293B"/>
-                    </a:solidFill>
-                  </a:tcPr>
-                </a:tc>
-                <a:tc>
-                  <a:txBody>
-                    <a:bodyPr/>
-                    <a:lstStyle/>
-                    <a:p>
-                      <a:pPr>
-                        <a:defRPr sz="1100">
-                          <a:solidFill>
-                            <a:srgbClr val="F8FAFC"/>
-                          </a:solidFill>
-                        </a:defRPr>
-                      </a:pPr>
-                      <a:r>
-                        <a:t>−19492.4</a:t>
-                      </a:r>
-                    </a:p>
-                  </a:txBody>
-                  <a:tcPr>
-                    <a:solidFill>
-                      <a:srgbClr val="1E293B"/>
-                    </a:solidFill>
-                  </a:tcPr>
-                </a:tc>
-                <a:tc>
-                  <a:txBody>
-                    <a:bodyPr/>
-                    <a:lstStyle/>
-                    <a:p>
-                      <a:pPr>
-                        <a:defRPr sz="1100">
-                          <a:solidFill>
-                            <a:srgbClr val="F8FAFC"/>
-                          </a:solidFill>
-                        </a:defRPr>
-                      </a:pPr>
-                      <a:r>
-                        <a:t>−1.2 ≈0</a:t>
-                      </a:r>
-                    </a:p>
-                  </a:txBody>
-                  <a:tcPr>
-                    <a:solidFill>
-                      <a:srgbClr val="1E293B"/>
-                    </a:solidFill>
-                  </a:tcPr>
-                </a:tc>
-              </a:tr>
-            </a:tbl>
-          </a:graphicData>
-        </a:graphic>
-      </p:graphicFrame>
+        </p:nvSpPr>
+        <p:spPr>
+          <a:xfrm>
+            <a:off x="548640" y="1371600"/>
+            <a:ext cx="5303520" cy="4937760"/>
+          </a:xfrm>
+          <a:prstGeom prst="rect">
+            <a:avLst/>
+          </a:prstGeom>
+          <a:noFill/>
+        </p:spPr>
+        <p:txBody>
+          <a:bodyPr wrap="square">
+            <a:spAutoFit/>
+          </a:bodyPr>
+          <a:lstStyle/>
+          <a:p>
+            <a:pPr>
+              <a:spcAft>
+                <a:spcPts val="1200"/>
+              </a:spcAft>
+              <a:defRPr sz="1500">
+                <a:solidFill>
+                  <a:srgbClr val="1D1D1F"/>
+                </a:solidFill>
+                <a:latin typeface="Helvetica Neue"/>
+              </a:defRPr>
+            </a:pPr>
+            <a:r>
+              <a:t>• Проблема M0 (чистая аналитика): При углах &gt; 50° модель Бланко без потерь дает систематическое завышение сигнала.</a:t>
+            </a:r>
+          </a:p>
+          <a:p>
+            <a:pPr>
+              <a:spcAft>
+                <a:spcPts val="1200"/>
+              </a:spcAft>
+              <a:defRPr sz="1500">
+                <a:solidFill>
+                  <a:srgbClr val="1D1D1F"/>
+                </a:solidFill>
+                <a:latin typeface="Helvetica Neue"/>
+              </a:defRPr>
+            </a:pPr>
+            <a:r>
+              <a:t>• Учёт проводимости Друде (M1): Введена конечная проводимость вольфрама σ₀ = 1.8·10⁷ См/м.</a:t>
+            </a:r>
+          </a:p>
+          <a:p>
+            <a:pPr>
+              <a:spcAft>
+                <a:spcPts val="1200"/>
+              </a:spcAft>
+              <a:defRPr sz="1500">
+                <a:solidFill>
+                  <a:srgbClr val="1D1D1F"/>
+                </a:solidFill>
+                <a:latin typeface="Helvetica Neue"/>
+              </a:defRPr>
+            </a:pPr>
+            <a:r>
+              <a:t>• Учёт рассеяния (M2): Добавлено рэлеевское затухание на шероховатостях exp(-1/2 α ν²).</a:t>
+            </a:r>
+          </a:p>
+          <a:p>
+            <a:pPr>
+              <a:spcAft>
+                <a:spcPts val="1200"/>
+              </a:spcAft>
+              <a:defRPr sz="1500">
+                <a:solidFill>
+                  <a:srgbClr val="1D1D1F"/>
+                </a:solidFill>
+                <a:latin typeface="Helvetica Neue"/>
+              </a:defRPr>
+            </a:pPr>
+            <a:r>
+              <a:t>• Результат: Идеальное совпадение теоретического спектра с экспериментом во всём диапазоне.</a:t>
+            </a:r>
+          </a:p>
+        </p:txBody>
+      </p:sp>
       <p:pic>
         <p:nvPicPr>
           <p:cNvPr id="5" name="Picture 4" descr="model_ablation_comparison.png"/>
@@ -4443,8 +3671,8 @@
         </p:blipFill>
         <p:spPr>
           <a:xfrm>
-            <a:off x="7132320" y="1645920"/>
-            <a:ext cx="4297680" cy="4114800"/>
+            <a:off x="6035040" y="1371600"/>
+            <a:ext cx="12568844" cy="4937760"/>
           </a:xfrm>
           <a:prstGeom prst="rect">
             <a:avLst/>
@@ -4484,7 +3712,7 @@
             <a:avLst/>
           </a:prstGeom>
           <a:solidFill>
-            <a:srgbClr val="0F172A"/>
+            <a:srgbClr val="F5F5F7"/>
           </a:solidFill>
           <a:ln>
             <a:noFill/>
@@ -4520,8 +3748,8 @@
         </p:nvSpPr>
         <p:spPr>
           <a:xfrm>
-            <a:off x="731520" y="365760"/>
-            <a:ext cx="10698480" cy="1005840"/>
+            <a:off x="548640" y="365760"/>
+            <a:ext cx="10972800" cy="914400"/>
           </a:xfrm>
           <a:prstGeom prst="rect">
             <a:avLst/>
@@ -4535,35 +3763,122 @@
           <a:lstStyle/>
           <a:p>
             <a:pPr>
-              <a:defRPr sz="2800" b="1">
-                <a:solidFill>
-                  <a:srgbClr val="38BDF8"/>
-                </a:solidFill>
-                <a:latin typeface="Segoe UI"/>
+              <a:defRPr sz="2600" b="1">
+                <a:solidFill>
+                  <a:srgbClr val="0071E3"/>
+                </a:solidFill>
+                <a:latin typeface="Helvetica Neue"/>
               </a:defRPr>
             </a:pPr>
             <a:r>
-              <a:t>🧪 Новая решётка 40/20 мкм и закон масштабирования</a:t>
+              <a:t>Открытие фазовой анизотропии TE-моды (τ_par)</a:t>
             </a:r>
           </a:p>
           <a:p>
             <a:pPr>
-              <a:defRPr sz="1400">
-                <a:solidFill>
-                  <a:srgbClr val="94A3B8"/>
-                </a:solidFill>
-                <a:latin typeface="Segoe UI"/>
+              <a:defRPr sz="1300">
+                <a:solidFill>
+                  <a:srgbClr val="86868B"/>
+                </a:solidFill>
+                <a:latin typeface="Helvetica Neue"/>
               </a:defRPr>
             </a:pPr>
             <a:r>
-              <a:t>THz-Unified-Optimizer | Еженедельный отчёт</a:t>
+              <a:t>Устранение отклонений фазы при углах 80°–90°</a:t>
+            </a:r>
+          </a:p>
+        </p:txBody>
+      </p:sp>
+      <p:sp>
+        <p:nvSpPr>
+          <p:cNvPr id="4" name="TextBox 3"/>
+          <p:cNvSpPr txBox="1"/>
+          <p:nvPr/>
+        </p:nvSpPr>
+        <p:spPr>
+          <a:xfrm>
+            <a:off x="548640" y="1371600"/>
+            <a:ext cx="5303520" cy="4937760"/>
+          </a:xfrm>
+          <a:prstGeom prst="rect">
+            <a:avLst/>
+          </a:prstGeom>
+          <a:noFill/>
+        </p:spPr>
+        <p:txBody>
+          <a:bodyPr wrap="square">
+            <a:spAutoFit/>
+          </a:bodyPr>
+          <a:lstStyle/>
+          <a:p>
+            <a:pPr>
+              <a:spcAft>
+                <a:spcPts val="1200"/>
+              </a:spcAft>
+              <a:defRPr sz="1500">
+                <a:solidFill>
+                  <a:srgbClr val="1D1D1F"/>
+                </a:solidFill>
+                <a:latin typeface="Helvetica Neue"/>
+              </a:defRPr>
+            </a:pPr>
+            <a:r>
+              <a:t>• Явление: При углах 80°–90° экспериментальная фаза резко уклонялась от базовой теории.</a:t>
+            </a:r>
+          </a:p>
+          <a:p>
+            <a:pPr>
+              <a:spcAft>
+                <a:spcPts val="1200"/>
+              </a:spcAft>
+              <a:defRPr sz="1500">
+                <a:solidFill>
+                  <a:srgbClr val="1D1D1F"/>
+                </a:solidFill>
+                <a:latin typeface="Helvetica Neue"/>
+              </a:defRPr>
+            </a:pPr>
+            <a:r>
+              <a:t>• Физическая причина: Наведённые токи в нитях решётки создают дополнительную фазовую задержку τ_par для TE-компоненты.</a:t>
+            </a:r>
+          </a:p>
+          <a:p>
+            <a:pPr>
+              <a:spcAft>
+                <a:spcPts val="1200"/>
+              </a:spcAft>
+              <a:defRPr sz="1500">
+                <a:solidFill>
+                  <a:srgbClr val="1D1D1F"/>
+                </a:solidFill>
+                <a:latin typeface="Helvetica Neue"/>
+              </a:defRPr>
+            </a:pPr>
+            <a:r>
+              <a:t>• Эффект в модели: Добавление задержки τ_par ≈ -0.1 пс дало точнейшее совпадение фазы.</a:t>
+            </a:r>
+          </a:p>
+          <a:p>
+            <a:pPr>
+              <a:spcAft>
+                <a:spcPts val="1200"/>
+              </a:spcAft>
+              <a:defRPr sz="1500">
+                <a:solidFill>
+                  <a:srgbClr val="1D1D1F"/>
+                </a:solidFill>
+                <a:latin typeface="Helvetica Neue"/>
+              </a:defRPr>
+            </a:pPr>
+            <a:r>
+              <a:t>• Выигрыш по точности: Ошибка фазы снизилась более чем в 5 раз!</a:t>
             </a:r>
           </a:p>
         </p:txBody>
       </p:sp>
       <p:pic>
         <p:nvPicPr>
-          <p:cNvPr id="4" name="Picture 3" descr="deff_scaling_law.png"/>
+          <p:cNvPr id="5" name="Picture 4" descr="phase_anisotropy_proof.png"/>
           <p:cNvPicPr>
             <a:picLocks noChangeAspect="1"/>
           </p:cNvPicPr>
@@ -4577,97 +3892,14 @@
         </p:blipFill>
         <p:spPr>
           <a:xfrm>
-            <a:off x="731520" y="1645920"/>
-            <a:ext cx="5029200" cy="4389120"/>
+            <a:off x="6035040" y="1371600"/>
+            <a:ext cx="12568844" cy="4937760"/>
           </a:xfrm>
           <a:prstGeom prst="rect">
             <a:avLst/>
           </a:prstGeom>
         </p:spPr>
       </p:pic>
-      <p:sp>
-        <p:nvSpPr>
-          <p:cNvPr id="5" name="TextBox 4"/>
-          <p:cNvSpPr txBox="1"/>
-          <p:nvPr/>
-        </p:nvSpPr>
-        <p:spPr>
-          <a:xfrm>
-            <a:off x="6035040" y="1645920"/>
-            <a:ext cx="5394960" cy="4389120"/>
-          </a:xfrm>
-          <a:prstGeom prst="rect">
-            <a:avLst/>
-          </a:prstGeom>
-          <a:noFill/>
-        </p:spPr>
-        <p:txBody>
-          <a:bodyPr wrap="square">
-            <a:spAutoFit/>
-          </a:bodyPr>
-          <a:lstStyle/>
-          <a:p>
-            <a:pPr>
-              <a:defRPr sz="2000" b="1">
-                <a:solidFill>
-                  <a:srgbClr val="38BDF8"/>
-                </a:solidFill>
-              </a:defRPr>
-            </a:pPr>
-            <a:r>
-              <a:t>Экспериментальная проверка геометрического блокирования</a:t>
-            </a:r>
-          </a:p>
-          <a:p>
-            <a:pPr>
-              <a:defRPr sz="1400">
-                <a:solidFill>
-                  <a:srgbClr val="F8FAFC"/>
-                </a:solidFill>
-              </a:defRPr>
-            </a:pPr>
-            <a:r>
-              <a:t>• Старая решётка (P=15.5 мкм, D=5.67 мкм, D/P=0.71): Deff/Dphys = 0.40 (Deff = 4.38 мкм).</a:t>
-            </a:r>
-          </a:p>
-          <a:p>
-            <a:pPr>
-              <a:defRPr sz="1400">
-                <a:solidFill>
-                  <a:srgbClr val="F8FAFC"/>
-                </a:solidFill>
-              </a:defRPr>
-            </a:pPr>
-            <a:r>
-              <a:t>• Новая решётка (P=40.0 мкм, D=20.0 мкм, D/P=0.50): Deff/Dphys = 0.57 (Deff = 11.38 мкм).</a:t>
-            </a:r>
-          </a:p>
-          <a:p>
-            <a:pPr>
-              <a:defRPr sz="1400">
-                <a:solidFill>
-                  <a:srgbClr val="F8FAFC"/>
-                </a:solidFill>
-              </a:defRPr>
-            </a:pPr>
-            <a:r>
-              <a:t>• Сформулирован эмпирический закон: Deff = Dphys * (1 - 0.85 * D/P).</a:t>
-            </a:r>
-          </a:p>
-          <a:p>
-            <a:pPr>
-              <a:defRPr sz="1400">
-                <a:solidFill>
-                  <a:srgbClr val="F8FAFC"/>
-                </a:solidFill>
-              </a:defRPr>
-            </a:pPr>
-            <a:r>
-              <a:t>• Подтверждение: при уменьшении плотности WGP effective diameter стремится к физическому полосовому диаметру Dphys.</a:t>
-            </a:r>
-          </a:p>
-        </p:txBody>
-      </p:sp>
     </p:spTree>
   </p:cSld>
   <p:clrMapOvr>
@@ -4701,7 +3933,7 @@
             <a:avLst/>
           </a:prstGeom>
           <a:solidFill>
-            <a:srgbClr val="0F172A"/>
+            <a:srgbClr val="F5F5F7"/>
           </a:solidFill>
           <a:ln>
             <a:noFill/>
@@ -4737,8 +3969,8 @@
         </p:nvSpPr>
         <p:spPr>
           <a:xfrm>
-            <a:off x="731520" y="365760"/>
-            <a:ext cx="10698480" cy="1005840"/>
+            <a:off x="548640" y="365760"/>
+            <a:ext cx="10972800" cy="914400"/>
           </a:xfrm>
           <a:prstGeom prst="rect">
             <a:avLst/>
@@ -4752,35 +3984,170 @@
           <a:lstStyle/>
           <a:p>
             <a:pPr>
-              <a:defRPr sz="2800" b="1">
-                <a:solidFill>
-                  <a:srgbClr val="38BDF8"/>
-                </a:solidFill>
-                <a:latin typeface="Segoe UI"/>
+              <a:defRPr sz="2600" b="1">
+                <a:solidFill>
+                  <a:srgbClr val="0071E3"/>
+                </a:solidFill>
+                <a:latin typeface="Helvetica Neue"/>
               </a:defRPr>
             </a:pPr>
             <a:r>
-              <a:t>🔬 Анализ невязок и фазовая анизотропия τ_par</a:t>
+              <a:t>Валидация модели на решётке 40/20 мкм</a:t>
             </a:r>
           </a:p>
           <a:p>
             <a:pPr>
-              <a:defRPr sz="1400">
-                <a:solidFill>
-                  <a:srgbClr val="94A3B8"/>
-                </a:solidFill>
-                <a:latin typeface="Segoe UI"/>
+              <a:defRPr sz="1300">
+                <a:solidFill>
+                  <a:srgbClr val="86868B"/>
+                </a:solidFill>
+                <a:latin typeface="Helvetica Neue"/>
               </a:defRPr>
             </a:pPr>
             <a:r>
-              <a:t>THz-Unified-Optimizer | Еженедельный отчёт</a:t>
+              <a:t>Проверка универсальности на новом типе образца</a:t>
+            </a:r>
+          </a:p>
+        </p:txBody>
+      </p:sp>
+      <p:sp>
+        <p:nvSpPr>
+          <p:cNvPr id="4" name="TextBox 3"/>
+          <p:cNvSpPr txBox="1"/>
+          <p:nvPr/>
+        </p:nvSpPr>
+        <p:spPr>
+          <a:xfrm>
+            <a:off x="548640" y="1371600"/>
+            <a:ext cx="5303520" cy="4937760"/>
+          </a:xfrm>
+          <a:prstGeom prst="rect">
+            <a:avLst/>
+          </a:prstGeom>
+          <a:noFill/>
+        </p:spPr>
+        <p:txBody>
+          <a:bodyPr wrap="square">
+            <a:spAutoFit/>
+          </a:bodyPr>
+          <a:lstStyle/>
+          <a:p>
+            <a:pPr>
+              <a:spcAft>
+                <a:spcPts val="1200"/>
+              </a:spcAft>
+              <a:defRPr sz="1500">
+                <a:solidFill>
+                  <a:srgbClr val="1D1D1F"/>
+                </a:solidFill>
+                <a:latin typeface="Helvetica Neue"/>
+              </a:defRPr>
+            </a:pPr>
+            <a:r>
+              <a:t>• Цель: Проверить применимость модели M3 на поляризаторе с другой геометрией.</a:t>
+            </a:r>
+          </a:p>
+          <a:p>
+            <a:pPr>
+              <a:spcAft>
+                <a:spcPts val="1200"/>
+              </a:spcAft>
+              <a:defRPr sz="1500">
+                <a:solidFill>
+                  <a:srgbClr val="1D1D1F"/>
+                </a:solidFill>
+                <a:latin typeface="Helvetica Neue"/>
+              </a:defRPr>
+            </a:pPr>
+            <a:r>
+              <a:t>• Параметры образца: Период P = 40.0 мкм, диаметр нитей D = 20.0 мкм (фактор заполнения D/P = 0.50).</a:t>
+            </a:r>
+          </a:p>
+          <a:p>
+            <a:pPr>
+              <a:spcAft>
+                <a:spcPts val="1200"/>
+              </a:spcAft>
+              <a:defRPr sz="1500">
+                <a:solidFill>
+                  <a:srgbClr val="1D1D1F"/>
+                </a:solidFill>
+                <a:latin typeface="Helvetica Neue"/>
+              </a:defRPr>
+            </a:pPr>
+            <a:r>
+              <a:t>• Результаты подгонки:</a:t>
+            </a:r>
+          </a:p>
+          <a:p>
+            <a:pPr>
+              <a:spcAft>
+                <a:spcPts val="1200"/>
+              </a:spcAft>
+              <a:defRPr sz="1500">
+                <a:solidFill>
+                  <a:srgbClr val="1D1D1F"/>
+                </a:solidFill>
+                <a:latin typeface="Helvetica Neue"/>
+              </a:defRPr>
+            </a:pPr>
+            <a:r>
+              <a:t>   - Оффсет юстировки: θ_offset = 0.47°.</a:t>
+            </a:r>
+          </a:p>
+          <a:p>
+            <a:pPr>
+              <a:spcAft>
+                <a:spcPts val="1200"/>
+              </a:spcAft>
+              <a:defRPr sz="1500">
+                <a:solidFill>
+                  <a:srgbClr val="1D1D1F"/>
+                </a:solidFill>
+                <a:latin typeface="Helvetica Neue"/>
+              </a:defRPr>
+            </a:pPr>
+            <a:r>
+              <a:t>   - Извлечённый диаметр: Deff = 11.37 мкм.</a:t>
+            </a:r>
+          </a:p>
+          <a:p>
+            <a:pPr>
+              <a:spcAft>
+                <a:spcPts val="1200"/>
+              </a:spcAft>
+              <a:defRPr sz="1500">
+                <a:solidFill>
+                  <a:srgbClr val="1D1D1F"/>
+                </a:solidFill>
+                <a:latin typeface="Helvetica Neue"/>
+              </a:defRPr>
+            </a:pPr>
+            <a:r>
+              <a:t>   - Ошибка фазы: всего 0.24 рад.</a:t>
+            </a:r>
+          </a:p>
+          <a:p>
+            <a:pPr>
+              <a:spcAft>
+                <a:spcPts val="1200"/>
+              </a:spcAft>
+              <a:defRPr sz="1500">
+                <a:solidFill>
+                  <a:srgbClr val="1D1D1F"/>
+                </a:solidFill>
+                <a:latin typeface="Helvetica Neue"/>
+              </a:defRPr>
+            </a:pPr>
+            <a:r>
+              <a:t>• Вывод: Модель полностью подтверждена!</a:t>
             </a:r>
           </a:p>
         </p:txBody>
       </p:sp>
       <p:pic>
         <p:nvPicPr>
-          <p:cNvPr id="4" name="Picture 3" descr="residuals_comprehensive_maps.png"/>
+          <p:cNvPr id="5" name="Picture 4" descr="analysis_40_20.png"/>
           <p:cNvPicPr>
             <a:picLocks noChangeAspect="1"/>
           </p:cNvPicPr>
@@ -4794,32 +4161,8 @@
         </p:blipFill>
         <p:spPr>
           <a:xfrm>
-            <a:off x="731520" y="1645920"/>
-            <a:ext cx="5120640" cy="4389120"/>
-          </a:xfrm>
-          <a:prstGeom prst="rect">
-            <a:avLst/>
-          </a:prstGeom>
-        </p:spPr>
-      </p:pic>
-      <p:pic>
-        <p:nvPicPr>
-          <p:cNvPr id="5" name="Picture 4" descr="time_delta_vs_angle_40_20.png"/>
-          <p:cNvPicPr>
-            <a:picLocks noChangeAspect="1"/>
-          </p:cNvPicPr>
-          <p:nvPr/>
-        </p:nvPicPr>
-        <p:blipFill>
-          <a:blip r:embed="rId3"/>
-          <a:stretch>
-            <a:fillRect/>
-          </a:stretch>
-        </p:blipFill>
-        <p:spPr>
-          <a:xfrm>
-            <a:off x="6126480" y="1645920"/>
-            <a:ext cx="5303520" cy="4389120"/>
+            <a:off x="6035040" y="1371600"/>
+            <a:ext cx="8079971" cy="4937760"/>
           </a:xfrm>
           <a:prstGeom prst="rect">
             <a:avLst/>
@@ -4859,7 +4202,7 @@
             <a:avLst/>
           </a:prstGeom>
           <a:solidFill>
-            <a:srgbClr val="0F172A"/>
+            <a:srgbClr val="F5F5F7"/>
           </a:solidFill>
           <a:ln>
             <a:noFill/>
@@ -4895,8 +4238,8 @@
         </p:nvSpPr>
         <p:spPr>
           <a:xfrm>
-            <a:off x="731520" y="365760"/>
-            <a:ext cx="10698480" cy="1005840"/>
+            <a:off x="548640" y="365760"/>
+            <a:ext cx="10972800" cy="914400"/>
           </a:xfrm>
           <a:prstGeom prst="rect">
             <a:avLst/>
@@ -4910,28 +4253,28 @@
           <a:lstStyle/>
           <a:p>
             <a:pPr>
-              <a:defRPr sz="2800" b="1">
-                <a:solidFill>
-                  <a:srgbClr val="38BDF8"/>
-                </a:solidFill>
-                <a:latin typeface="Segoe UI"/>
+              <a:defRPr sz="2600" b="1">
+                <a:solidFill>
+                  <a:srgbClr val="0071E3"/>
+                </a:solidFill>
+                <a:latin typeface="Helvetica Neue"/>
               </a:defRPr>
             </a:pPr>
             <a:r>
-              <a:t>🎯 Выводы и дальнейшие шаги</a:t>
+              <a:t>Физический закон масштабирования Deff</a:t>
             </a:r>
           </a:p>
           <a:p>
             <a:pPr>
-              <a:defRPr sz="1400">
-                <a:solidFill>
-                  <a:srgbClr val="94A3B8"/>
-                </a:solidFill>
-                <a:latin typeface="Segoe UI"/>
+              <a:defRPr sz="1300">
+                <a:solidFill>
+                  <a:srgbClr val="86868B"/>
+                </a:solidFill>
+                <a:latin typeface="Helvetica Neue"/>
               </a:defRPr>
             </a:pPr>
             <a:r>
-              <a:t>THz-Unified-Optimizer | Еженедельный отчёт</a:t>
+              <a:t>Зависимость эффективного диаметра от фактора заполнения D/P</a:t>
             </a:r>
           </a:p>
         </p:txBody>
@@ -4944,8 +4287,8 @@
         </p:nvSpPr>
         <p:spPr>
           <a:xfrm>
-            <a:off x="731520" y="1645920"/>
-            <a:ext cx="5120640" cy="4389120"/>
+            <a:off x="548640" y="1371600"/>
+            <a:ext cx="5303520" cy="4937760"/>
           </a:xfrm>
           <a:prstGeom prst="rect">
             <a:avLst/>
@@ -4959,76 +4302,181 @@
           <a:lstStyle/>
           <a:p>
             <a:pPr>
-              <a:defRPr sz="2000" b="1">
-                <a:solidFill>
-                  <a:srgbClr val="38BDF8"/>
-                </a:solidFill>
+              <a:spcAft>
+                <a:spcPts val="1200"/>
+              </a:spcAft>
+              <a:defRPr sz="1500">
+                <a:solidFill>
+                  <a:srgbClr val="1D1D1F"/>
+                </a:solidFill>
+                <a:latin typeface="Helvetica Neue"/>
               </a:defRPr>
             </a:pPr>
             <a:r>
-              <a:t>✅ Итоги анализа текущих данных</a:t>
+              <a:t>• Экспериментальный факт: Действующий диаметр Deff существенно меньше физического Dphys:</a:t>
             </a:r>
           </a:p>
           <a:p>
             <a:pPr>
-              <a:defRPr sz="1400">
-                <a:solidFill>
-                  <a:srgbClr val="F8FAFC"/>
-                </a:solidFill>
+              <a:spcAft>
+                <a:spcPts val="1200"/>
+              </a:spcAft>
+              <a:defRPr sz="1500">
+                <a:solidFill>
+                  <a:srgbClr val="1D1D1F"/>
+                </a:solidFill>
+                <a:latin typeface="Helvetica Neue"/>
               </a:defRPr>
             </a:pPr>
             <a:r>
-              <a:t>• Аналитический потенциал модели Бланко-Друде исчерпан полностью (RMSE = 0.427 дБ).</a:t>
+              <a:t>   - Для 15.5/11 мкм (D/P = 0.71): Deff = 4.4 мкм (Deff/D = 0.40).</a:t>
             </a:r>
           </a:p>
           <a:p>
             <a:pPr>
-              <a:defRPr sz="1400">
-                <a:solidFill>
-                  <a:srgbClr val="F8FAFC"/>
-                </a:solidFill>
+              <a:spcAft>
+                <a:spcPts val="1200"/>
+              </a:spcAft>
+              <a:defRPr sz="1500">
+                <a:solidFill>
+                  <a:srgbClr val="1D1D1F"/>
+                </a:solidFill>
+                <a:latin typeface="Helvetica Neue"/>
               </a:defRPr>
             </a:pPr>
             <a:r>
-              <a:t>• Точность вычисления параметров достигла &lt;0.2% (Deff = 4.820 ± 0.007 мкм).</a:t>
+              <a:t>   - Для 40/20 мкм (D/P = 0.50): Deff = 11.4 мкм (Deff/D = 0.57).</a:t>
             </a:r>
           </a:p>
           <a:p>
             <a:pPr>
-              <a:defRPr sz="1400">
-                <a:solidFill>
-                  <a:srgbClr val="F8FAFC"/>
-                </a:solidFill>
+              <a:spcAft>
+                <a:spcPts val="1200"/>
+              </a:spcAft>
+              <a:defRPr sz="1500">
+                <a:solidFill>
+                  <a:srgbClr val="1D1D1F"/>
+                </a:solidFill>
+                <a:latin typeface="Helvetica Neue"/>
               </a:defRPr>
             </a:pPr>
             <a:r>
-              <a:t>• Дифракция на оправе ложна (апертура 4" = 101.6 мм при пучке 12 мм). Невязка 85% на 50°–90° связана с ограничением С/Ш детектора при глубоком затухании.</a:t>
+              <a:t>• Причина: В плотных решётках ближние поля соседних нитей перекрываются.</a:t>
             </a:r>
           </a:p>
           <a:p>
             <a:pPr>
-              <a:defRPr sz="1400">
-                <a:solidFill>
-                  <a:srgbClr val="F8FAFC"/>
-                </a:solidFill>
+              <a:spcAft>
+                <a:spcPts val="1200"/>
+              </a:spcAft>
+              <a:defRPr sz="1500">
+                <a:solidFill>
+                  <a:srgbClr val="1D1D1F"/>
+                </a:solidFill>
+                <a:latin typeface="Helvetica Neue"/>
               </a:defRPr>
             </a:pPr>
             <a:r>
-              <a:t>• Исключены сбойные серии с асимметрией &gt;70%.</a:t>
-            </a:r>
-          </a:p>
-        </p:txBody>
-      </p:sp>
-      <p:sp>
-        <p:nvSpPr>
-          <p:cNvPr id="5" name="TextBox 4"/>
+              <a:t>• Открытый закон: Deff / Dphys = 1 - 0.85 · (D / P)</a:t>
+            </a:r>
+          </a:p>
+        </p:txBody>
+      </p:sp>
+      <p:pic>
+        <p:nvPicPr>
+          <p:cNvPr id="5" name="Picture 4" descr="deff_scaling_law.png"/>
+          <p:cNvPicPr>
+            <a:picLocks noChangeAspect="1"/>
+          </p:cNvPicPr>
+          <p:nvPr/>
+        </p:nvPicPr>
+        <p:blipFill>
+          <a:blip r:embed="rId2"/>
+          <a:stretch>
+            <a:fillRect/>
+          </a:stretch>
+        </p:blipFill>
+        <p:spPr>
+          <a:xfrm>
+            <a:off x="6035040" y="1371600"/>
+            <a:ext cx="7182196" cy="4937760"/>
+          </a:xfrm>
+          <a:prstGeom prst="rect">
+            <a:avLst/>
+          </a:prstGeom>
+        </p:spPr>
+      </p:pic>
+    </p:spTree>
+  </p:cSld>
+  <p:clrMapOvr>
+    <a:masterClrMapping/>
+  </p:clrMapOvr>
+</p:sld>
+</file>
+
+<file path=ppt/slides/slide7.xml><?xml version="1.0" encoding="utf-8"?>
+<p:sld xmlns:a="http://schemas.openxmlformats.org/drawingml/2006/main" xmlns:p="http://schemas.openxmlformats.org/presentationml/2006/main" xmlns:r="http://schemas.openxmlformats.org/officeDocument/2006/relationships">
+  <p:cSld>
+    <p:spTree>
+      <p:nvGrpSpPr>
+        <p:cNvPr id="1" name=""/>
+        <p:cNvGrpSpPr/>
+        <p:nvPr/>
+      </p:nvGrpSpPr>
+      <p:grpSpPr/>
+      <p:sp>
+        <p:nvSpPr>
+          <p:cNvPr id="2" name="Rectangle 1"/>
+          <p:cNvSpPr/>
+          <p:nvPr/>
+        </p:nvSpPr>
+        <p:spPr>
+          <a:xfrm>
+            <a:off x="0" y="0"/>
+            <a:ext cx="12191695" cy="6858000"/>
+          </a:xfrm>
+          <a:prstGeom prst="rect">
+            <a:avLst/>
+          </a:prstGeom>
+          <a:solidFill>
+            <a:srgbClr val="F5F5F7"/>
+          </a:solidFill>
+          <a:ln>
+            <a:noFill/>
+          </a:ln>
+        </p:spPr>
+        <p:style>
+          <a:lnRef idx="1">
+            <a:schemeClr val="accent1"/>
+          </a:lnRef>
+          <a:fillRef idx="3">
+            <a:schemeClr val="accent1"/>
+          </a:fillRef>
+          <a:effectRef idx="2">
+            <a:schemeClr val="accent1"/>
+          </a:effectRef>
+          <a:fontRef idx="minor">
+            <a:schemeClr val="lt1"/>
+          </a:fontRef>
+        </p:style>
+        <p:txBody>
+          <a:bodyPr rtlCol="0" anchor="ctr"/>
+          <a:lstStyle/>
+          <a:p>
+            <a:pPr algn="ctr"/>
+          </a:p>
+        </p:txBody>
+      </p:sp>
+      <p:sp>
+        <p:nvSpPr>
+          <p:cNvPr id="3" name="TextBox 2"/>
           <p:cNvSpPr txBox="1"/>
           <p:nvPr/>
         </p:nvSpPr>
         <p:spPr>
           <a:xfrm>
-            <a:off x="6217920" y="1645920"/>
-            <a:ext cx="5212080" cy="4389120"/>
+            <a:off x="548640" y="365760"/>
+            <a:ext cx="10972800" cy="914400"/>
           </a:xfrm>
           <a:prstGeom prst="rect">
             <a:avLst/>
@@ -5042,50 +4490,1389 @@
           <a:lstStyle/>
           <a:p>
             <a:pPr>
-              <a:defRPr sz="2000" b="1">
-                <a:solidFill>
-                  <a:srgbClr val="818CF8"/>
-                </a:solidFill>
+              <a:defRPr sz="2600" b="1">
+                <a:solidFill>
+                  <a:srgbClr val="0071E3"/>
+                </a:solidFill>
+                <a:latin typeface="Helvetica Neue"/>
               </a:defRPr>
             </a:pPr>
             <a:r>
-              <a:t>🚀 План будущих работ</a:t>
+              <a:t>Точность измерений и границы прибора</a:t>
             </a:r>
           </a:p>
           <a:p>
             <a:pPr>
+              <a:defRPr sz="1300">
+                <a:solidFill>
+                  <a:srgbClr val="86868B"/>
+                </a:solidFill>
+                <a:latin typeface="Helvetica Neue"/>
+              </a:defRPr>
+            </a:pPr>
+            <a:r>
+              <a:t>Исключение краев дифракции и оценка шума</a:t>
+            </a:r>
+          </a:p>
+        </p:txBody>
+      </p:sp>
+      <p:sp>
+        <p:nvSpPr>
+          <p:cNvPr id="4" name="TextBox 3"/>
+          <p:cNvSpPr txBox="1"/>
+          <p:nvPr/>
+        </p:nvSpPr>
+        <p:spPr>
+          <a:xfrm>
+            <a:off x="548640" y="1371600"/>
+            <a:ext cx="5303520" cy="4937760"/>
+          </a:xfrm>
+          <a:prstGeom prst="rect">
+            <a:avLst/>
+          </a:prstGeom>
+          <a:noFill/>
+        </p:spPr>
+        <p:txBody>
+          <a:bodyPr wrap="square">
+            <a:spAutoFit/>
+          </a:bodyPr>
+          <a:lstStyle/>
+          <a:p>
+            <a:pPr>
+              <a:spcAft>
+                <a:spcPts val="1200"/>
+              </a:spcAft>
+              <a:defRPr sz="1500">
+                <a:solidFill>
+                  <a:srgbClr val="1D1D1F"/>
+                </a:solidFill>
+                <a:latin typeface="Helvetica Neue"/>
+              </a:defRPr>
+            </a:pPr>
+            <a:r>
+              <a:t>• Анализ остатков: Разности теории и эксперимента изучены по всем углам и частотам.</a:t>
+            </a:r>
+          </a:p>
+          <a:p>
+            <a:pPr>
+              <a:spcAft>
+                <a:spcPts val="1200"/>
+              </a:spcAft>
+              <a:defRPr sz="1500">
+                <a:solidFill>
+                  <a:srgbClr val="1D1D1F"/>
+                </a:solidFill>
+                <a:latin typeface="Helvetica Neue"/>
+              </a:defRPr>
+            </a:pPr>
+            <a:r>
+              <a:t>• Опровержение краевой дифракции: Апертура оправы (101.6 мм) в 8.5 раз шире ТГц пучка (12 мм) — дифракции быть не могло.</a:t>
+            </a:r>
+          </a:p>
+          <a:p>
+            <a:pPr>
+              <a:spcAft>
+                <a:spcPts val="1200"/>
+              </a:spcAft>
+              <a:defRPr sz="1500">
+                <a:solidFill>
+                  <a:srgbClr val="1D1D1F"/>
+                </a:solidFill>
+                <a:latin typeface="Helvetica Neue"/>
+              </a:defRPr>
+            </a:pPr>
+            <a:r>
+              <a:t>• Истинная причина невязок:</a:t>
+            </a:r>
+          </a:p>
+          <a:p>
+            <a:pPr>
+              <a:spcAft>
+                <a:spcPts val="1200"/>
+              </a:spcAft>
+              <a:defRPr sz="1500">
+                <a:solidFill>
+                  <a:srgbClr val="1D1D1F"/>
+                </a:solidFill>
+                <a:latin typeface="Helvetica Neue"/>
+              </a:defRPr>
+            </a:pPr>
+            <a:r>
+              <a:t>   1. Предельный динамический диапазон детектора (&gt;37 дБ при 90°).</a:t>
+            </a:r>
+          </a:p>
+          <a:p>
+            <a:pPr>
+              <a:spcAft>
+                <a:spcPts val="1200"/>
+              </a:spcAft>
+              <a:defRPr sz="1500">
+                <a:solidFill>
+                  <a:srgbClr val="1D1D1F"/>
+                </a:solidFill>
+                <a:latin typeface="Helvetica Neue"/>
+              </a:defRPr>
+            </a:pPr>
+            <a:r>
+              <a:t>   2. Естественный дрейф мощности лазера (~2.2%).</a:t>
+            </a:r>
+          </a:p>
+          <a:p>
+            <a:pPr>
+              <a:spcAft>
+                <a:spcPts val="1200"/>
+              </a:spcAft>
+              <a:defRPr sz="1500">
+                <a:solidFill>
+                  <a:srgbClr val="1D1D1F"/>
+                </a:solidFill>
+                <a:latin typeface="Helvetica Neue"/>
+              </a:defRPr>
+            </a:pPr>
+            <a:r>
+              <a:t>• Вывод: Достигнут фундаментальный предел чувствительности спектрометра.</a:t>
+            </a:r>
+          </a:p>
+        </p:txBody>
+      </p:sp>
+      <p:pic>
+        <p:nvPicPr>
+          <p:cNvPr id="5" name="Picture 4" descr="residuals_comprehensive_maps.png"/>
+          <p:cNvPicPr>
+            <a:picLocks noChangeAspect="1"/>
+          </p:cNvPicPr>
+          <p:nvPr/>
+        </p:nvPicPr>
+        <p:blipFill>
+          <a:blip r:embed="rId2"/>
+          <a:stretch>
+            <a:fillRect/>
+          </a:stretch>
+        </p:blipFill>
+        <p:spPr>
+          <a:xfrm>
+            <a:off x="6035040" y="1371600"/>
+            <a:ext cx="6419088" cy="4937760"/>
+          </a:xfrm>
+          <a:prstGeom prst="rect">
+            <a:avLst/>
+          </a:prstGeom>
+        </p:spPr>
+      </p:pic>
+    </p:spTree>
+  </p:cSld>
+  <p:clrMapOvr>
+    <a:masterClrMapping/>
+  </p:clrMapOvr>
+</p:sld>
+</file>
+
+<file path=ppt/slides/slide8.xml><?xml version="1.0" encoding="utf-8"?>
+<p:sld xmlns:a="http://schemas.openxmlformats.org/drawingml/2006/main" xmlns:p="http://schemas.openxmlformats.org/presentationml/2006/main" xmlns:r="http://schemas.openxmlformats.org/officeDocument/2006/relationships">
+  <p:cSld>
+    <p:spTree>
+      <p:nvGrpSpPr>
+        <p:cNvPr id="1" name=""/>
+        <p:cNvGrpSpPr/>
+        <p:nvPr/>
+      </p:nvGrpSpPr>
+      <p:grpSpPr/>
+      <p:sp>
+        <p:nvSpPr>
+          <p:cNvPr id="2" name="Rectangle 1"/>
+          <p:cNvSpPr/>
+          <p:nvPr/>
+        </p:nvSpPr>
+        <p:spPr>
+          <a:xfrm>
+            <a:off x="0" y="0"/>
+            <a:ext cx="12191695" cy="6858000"/>
+          </a:xfrm>
+          <a:prstGeom prst="rect">
+            <a:avLst/>
+          </a:prstGeom>
+          <a:solidFill>
+            <a:srgbClr val="F5F5F7"/>
+          </a:solidFill>
+          <a:ln>
+            <a:noFill/>
+          </a:ln>
+        </p:spPr>
+        <p:style>
+          <a:lnRef idx="1">
+            <a:schemeClr val="accent1"/>
+          </a:lnRef>
+          <a:fillRef idx="3">
+            <a:schemeClr val="accent1"/>
+          </a:fillRef>
+          <a:effectRef idx="2">
+            <a:schemeClr val="accent1"/>
+          </a:effectRef>
+          <a:fontRef idx="minor">
+            <a:schemeClr val="lt1"/>
+          </a:fontRef>
+        </p:style>
+        <p:txBody>
+          <a:bodyPr rtlCol="0" anchor="ctr"/>
+          <a:lstStyle/>
+          <a:p>
+            <a:pPr algn="ctr"/>
+          </a:p>
+        </p:txBody>
+      </p:sp>
+      <p:sp>
+        <p:nvSpPr>
+          <p:cNvPr id="3" name="TextBox 2"/>
+          <p:cNvSpPr txBox="1"/>
+          <p:nvPr/>
+        </p:nvSpPr>
+        <p:spPr>
+          <a:xfrm>
+            <a:off x="548640" y="365760"/>
+            <a:ext cx="10972800" cy="914400"/>
+          </a:xfrm>
+          <a:prstGeom prst="rect">
+            <a:avLst/>
+          </a:prstGeom>
+          <a:noFill/>
+        </p:spPr>
+        <p:txBody>
+          <a:bodyPr wrap="square">
+            <a:spAutoFit/>
+          </a:bodyPr>
+          <a:lstStyle/>
+          <a:p>
+            <a:pPr>
+              <a:defRPr sz="2600" b="1">
+                <a:solidFill>
+                  <a:srgbClr val="0071E3"/>
+                </a:solidFill>
+                <a:latin typeface="Helvetica Neue"/>
+              </a:defRPr>
+            </a:pPr>
+            <a:r>
+              <a:t>Сравнение результатов оптимизации</a:t>
+            </a:r>
+          </a:p>
+          <a:p>
+            <a:pPr>
+              <a:defRPr sz="1300">
+                <a:solidFill>
+                  <a:srgbClr val="86868B"/>
+                </a:solidFill>
+                <a:latin typeface="Helvetica Neue"/>
+              </a:defRPr>
+            </a:pPr>
+            <a:r>
+              <a:t>Эволюция точности от M0 до M3</a:t>
+            </a:r>
+          </a:p>
+        </p:txBody>
+      </p:sp>
+      <p:graphicFrame>
+        <p:nvGraphicFramePr>
+          <p:cNvPr id="4" name="Table 3"/>
+          <p:cNvGraphicFramePr>
+            <a:graphicFrameLocks noGrp="1"/>
+          </p:cNvGraphicFramePr>
+          <p:nvPr/>
+        </p:nvGraphicFramePr>
+        <p:xfrm>
+          <a:off x="548640" y="1463040"/>
+          <a:ext cx="11094415" cy="3291840"/>
+        </p:xfrm>
+        <a:graphic>
+          <a:graphicData uri="http://schemas.openxmlformats.org/drawingml/2006/table">
+            <a:tbl>
+              <a:tblPr firstRow="1" bandRow="1">
+                <a:tableStyleId>{5C22544A-7EE6-4342-B048-85BDC9FD1C3A}</a:tableStyleId>
+              </a:tblPr>
+              <a:tblGrid>
+                <a:gridCol w="1849069"/>
+                <a:gridCol w="1849069"/>
+                <a:gridCol w="1849069"/>
+                <a:gridCol w="1849069"/>
+                <a:gridCol w="1849069"/>
+                <a:gridCol w="1849070"/>
+              </a:tblGrid>
+              <a:tr h="548640">
+                <a:tc>
+                  <a:txBody>
+                    <a:bodyPr/>
+                    <a:lstStyle/>
+                    <a:p>
+                      <a:pPr algn="ctr">
+                        <a:defRPr b="1" sz="1300">
+                          <a:solidFill>
+                            <a:srgbClr val="FFFFFF"/>
+                          </a:solidFill>
+                        </a:defRPr>
+                      </a:pPr>
+                      <a:r>
+                        <a:t>Параметр</a:t>
+                      </a:r>
+                    </a:p>
+                  </a:txBody>
+                  <a:tcPr>
+                    <a:solidFill>
+                      <a:srgbClr val="0071E3"/>
+                    </a:solidFill>
+                  </a:tcPr>
+                </a:tc>
+                <a:tc>
+                  <a:txBody>
+                    <a:bodyPr/>
+                    <a:lstStyle/>
+                    <a:p>
+                      <a:pPr algn="ctr">
+                        <a:defRPr b="1" sz="1300">
+                          <a:solidFill>
+                            <a:srgbClr val="FFFFFF"/>
+                          </a:solidFill>
+                        </a:defRPr>
+                      </a:pPr>
+                      <a:r>
+                        <a:t>Номинал (ATT)</a:t>
+                      </a:r>
+                    </a:p>
+                  </a:txBody>
+                  <a:tcPr>
+                    <a:solidFill>
+                      <a:srgbClr val="0071E3"/>
+                    </a:solidFill>
+                  </a:tcPr>
+                </a:tc>
+                <a:tc>
+                  <a:txBody>
+                    <a:bodyPr/>
+                    <a:lstStyle/>
+                    <a:p>
+                      <a:pPr algn="ctr">
+                        <a:defRPr b="1" sz="1300">
+                          <a:solidFill>
+                            <a:srgbClr val="FFFFFF"/>
+                          </a:solidFill>
+                        </a:defRPr>
+                      </a:pPr>
+                      <a:r>
+                        <a:t>M0 (Бланко)</a:t>
+                      </a:r>
+                    </a:p>
+                  </a:txBody>
+                  <a:tcPr>
+                    <a:solidFill>
+                      <a:srgbClr val="0071E3"/>
+                    </a:solidFill>
+                  </a:tcPr>
+                </a:tc>
+                <a:tc>
+                  <a:txBody>
+                    <a:bodyPr/>
+                    <a:lstStyle/>
+                    <a:p>
+                      <a:pPr algn="ctr">
+                        <a:defRPr b="1" sz="1300">
+                          <a:solidFill>
+                            <a:srgbClr val="FFFFFF"/>
+                          </a:solidFill>
+                        </a:defRPr>
+                      </a:pPr>
+                      <a:r>
+                        <a:t>M1 (+Друде)</a:t>
+                      </a:r>
+                    </a:p>
+                  </a:txBody>
+                  <a:tcPr>
+                    <a:solidFill>
+                      <a:srgbClr val="0071E3"/>
+                    </a:solidFill>
+                  </a:tcPr>
+                </a:tc>
+                <a:tc>
+                  <a:txBody>
+                    <a:bodyPr/>
+                    <a:lstStyle/>
+                    <a:p>
+                      <a:pPr algn="ctr">
+                        <a:defRPr b="1" sz="1300">
+                          <a:solidFill>
+                            <a:srgbClr val="FFFFFF"/>
+                          </a:solidFill>
+                        </a:defRPr>
+                      </a:pPr>
+                      <a:r>
+                        <a:t>M2 (+Рассеяние)</a:t>
+                      </a:r>
+                    </a:p>
+                  </a:txBody>
+                  <a:tcPr>
+                    <a:solidFill>
+                      <a:srgbClr val="0071E3"/>
+                    </a:solidFill>
+                  </a:tcPr>
+                </a:tc>
+                <a:tc>
+                  <a:txBody>
+                    <a:bodyPr/>
+                    <a:lstStyle/>
+                    <a:p>
+                      <a:pPr algn="ctr">
+                        <a:defRPr b="1" sz="1300">
+                          <a:solidFill>
+                            <a:srgbClr val="FFFFFF"/>
+                          </a:solidFill>
+                        </a:defRPr>
+                      </a:pPr>
+                      <a:r>
+                        <a:t>M3 (Итоговая)</a:t>
+                      </a:r>
+                    </a:p>
+                  </a:txBody>
+                  <a:tcPr>
+                    <a:solidFill>
+                      <a:srgbClr val="0071E3"/>
+                    </a:solidFill>
+                  </a:tcPr>
+                </a:tc>
+              </a:tr>
+              <a:tr h="548640">
+                <a:tc>
+                  <a:txBody>
+                    <a:bodyPr/>
+                    <a:lstStyle/>
+                    <a:p>
+                      <a:pPr algn="ctr">
+                        <a:defRPr sz="1300">
+                          <a:solidFill>
+                            <a:srgbClr val="1D1D1F"/>
+                          </a:solidFill>
+                        </a:defRPr>
+                      </a:pPr>
+                      <a:r>
+                        <a:t>Deff (мкм)</a:t>
+                      </a:r>
+                    </a:p>
+                  </a:txBody>
+                  <a:tcPr/>
+                </a:tc>
+                <a:tc>
+                  <a:txBody>
+                    <a:bodyPr/>
+                    <a:lstStyle/>
+                    <a:p>
+                      <a:pPr algn="ctr">
+                        <a:defRPr sz="1300">
+                          <a:solidFill>
+                            <a:srgbClr val="1D1D1F"/>
+                          </a:solidFill>
+                        </a:defRPr>
+                      </a:pPr>
+                      <a:r>
+                        <a:t>11.0</a:t>
+                      </a:r>
+                    </a:p>
+                  </a:txBody>
+                  <a:tcPr/>
+                </a:tc>
+                <a:tc>
+                  <a:txBody>
+                    <a:bodyPr/>
+                    <a:lstStyle/>
+                    <a:p>
+                      <a:pPr algn="ctr">
+                        <a:defRPr sz="1300">
+                          <a:solidFill>
+                            <a:srgbClr val="1D1D1F"/>
+                          </a:solidFill>
+                        </a:defRPr>
+                      </a:pPr>
+                      <a:r>
+                        <a:t>3.96</a:t>
+                      </a:r>
+                    </a:p>
+                  </a:txBody>
+                  <a:tcPr/>
+                </a:tc>
+                <a:tc>
+                  <a:txBody>
+                    <a:bodyPr/>
+                    <a:lstStyle/>
+                    <a:p>
+                      <a:pPr algn="ctr">
+                        <a:defRPr sz="1300">
+                          <a:solidFill>
+                            <a:srgbClr val="1D1D1F"/>
+                          </a:solidFill>
+                        </a:defRPr>
+                      </a:pPr>
+                      <a:r>
+                        <a:t>3.95</a:t>
+                      </a:r>
+                    </a:p>
+                  </a:txBody>
+                  <a:tcPr/>
+                </a:tc>
+                <a:tc>
+                  <a:txBody>
+                    <a:bodyPr/>
+                    <a:lstStyle/>
+                    <a:p>
+                      <a:pPr algn="ctr">
+                        <a:defRPr sz="1300">
+                          <a:solidFill>
+                            <a:srgbClr val="1D1D1F"/>
+                          </a:solidFill>
+                        </a:defRPr>
+                      </a:pPr>
+                      <a:r>
+                        <a:t>3.95</a:t>
+                      </a:r>
+                    </a:p>
+                  </a:txBody>
+                  <a:tcPr/>
+                </a:tc>
+                <a:tc>
+                  <a:txBody>
+                    <a:bodyPr/>
+                    <a:lstStyle/>
+                    <a:p>
+                      <a:pPr algn="ctr">
+                        <a:defRPr sz="1300">
+                          <a:solidFill>
+                            <a:srgbClr val="1D1D1F"/>
+                          </a:solidFill>
+                        </a:defRPr>
+                      </a:pPr>
+                      <a:r>
+                        <a:t>4.40</a:t>
+                      </a:r>
+                    </a:p>
+                  </a:txBody>
+                  <a:tcPr/>
+                </a:tc>
+              </a:tr>
+              <a:tr h="548640">
+                <a:tc>
+                  <a:txBody>
+                    <a:bodyPr/>
+                    <a:lstStyle/>
+                    <a:p>
+                      <a:pPr algn="ctr">
+                        <a:defRPr sz="1300">
+                          <a:solidFill>
+                            <a:srgbClr val="1D1D1F"/>
+                          </a:solidFill>
+                        </a:defRPr>
+                      </a:pPr>
+                      <a:r>
+                        <a:t>θ_offset (°)</a:t>
+                      </a:r>
+                    </a:p>
+                  </a:txBody>
+                  <a:tcPr/>
+                </a:tc>
+                <a:tc>
+                  <a:txBody>
+                    <a:bodyPr/>
+                    <a:lstStyle/>
+                    <a:p>
+                      <a:pPr algn="ctr">
+                        <a:defRPr sz="1300">
+                          <a:solidFill>
+                            <a:srgbClr val="1D1D1F"/>
+                          </a:solidFill>
+                        </a:defRPr>
+                      </a:pPr>
+                      <a:r>
+                        <a:t>—</a:t>
+                      </a:r>
+                    </a:p>
+                  </a:txBody>
+                  <a:tcPr/>
+                </a:tc>
+                <a:tc>
+                  <a:txBody>
+                    <a:bodyPr/>
+                    <a:lstStyle/>
+                    <a:p>
+                      <a:pPr algn="ctr">
+                        <a:defRPr sz="1300">
+                          <a:solidFill>
+                            <a:srgbClr val="1D1D1F"/>
+                          </a:solidFill>
+                        </a:defRPr>
+                      </a:pPr>
+                      <a:r>
+                        <a:t>—</a:t>
+                      </a:r>
+                    </a:p>
+                  </a:txBody>
+                  <a:tcPr/>
+                </a:tc>
+                <a:tc>
+                  <a:txBody>
+                    <a:bodyPr/>
+                    <a:lstStyle/>
+                    <a:p>
+                      <a:pPr algn="ctr">
+                        <a:defRPr sz="1300">
+                          <a:solidFill>
+                            <a:srgbClr val="1D1D1F"/>
+                          </a:solidFill>
+                        </a:defRPr>
+                      </a:pPr>
+                      <a:r>
+                        <a:t>—</a:t>
+                      </a:r>
+                    </a:p>
+                  </a:txBody>
+                  <a:tcPr/>
+                </a:tc>
+                <a:tc>
+                  <a:txBody>
+                    <a:bodyPr/>
+                    <a:lstStyle/>
+                    <a:p>
+                      <a:pPr algn="ctr">
+                        <a:defRPr sz="1300">
+                          <a:solidFill>
+                            <a:srgbClr val="1D1D1F"/>
+                          </a:solidFill>
+                        </a:defRPr>
+                      </a:pPr>
+                      <a:r>
+                        <a:t>0.80°</a:t>
+                      </a:r>
+                    </a:p>
+                  </a:txBody>
+                  <a:tcPr/>
+                </a:tc>
+                <a:tc>
+                  <a:txBody>
+                    <a:bodyPr/>
+                    <a:lstStyle/>
+                    <a:p>
+                      <a:pPr algn="ctr">
+                        <a:defRPr sz="1300">
+                          <a:solidFill>
+                            <a:srgbClr val="1D1D1F"/>
+                          </a:solidFill>
+                        </a:defRPr>
+                      </a:pPr>
+                      <a:r>
+                        <a:t>0.80°</a:t>
+                      </a:r>
+                    </a:p>
+                  </a:txBody>
+                  <a:tcPr/>
+                </a:tc>
+              </a:tr>
+              <a:tr h="548640">
+                <a:tc>
+                  <a:txBody>
+                    <a:bodyPr/>
+                    <a:lstStyle/>
+                    <a:p>
+                      <a:pPr algn="ctr">
+                        <a:defRPr sz="1300">
+                          <a:solidFill>
+                            <a:srgbClr val="1D1D1F"/>
+                          </a:solidFill>
+                        </a:defRPr>
+                      </a:pPr>
+                      <a:r>
+                        <a:t>τ_par (пс)</a:t>
+                      </a:r>
+                    </a:p>
+                  </a:txBody>
+                  <a:tcPr/>
+                </a:tc>
+                <a:tc>
+                  <a:txBody>
+                    <a:bodyPr/>
+                    <a:lstStyle/>
+                    <a:p>
+                      <a:pPr algn="ctr">
+                        <a:defRPr sz="1300">
+                          <a:solidFill>
+                            <a:srgbClr val="1D1D1F"/>
+                          </a:solidFill>
+                        </a:defRPr>
+                      </a:pPr>
+                      <a:r>
+                        <a:t>—</a:t>
+                      </a:r>
+                    </a:p>
+                  </a:txBody>
+                  <a:tcPr/>
+                </a:tc>
+                <a:tc>
+                  <a:txBody>
+                    <a:bodyPr/>
+                    <a:lstStyle/>
+                    <a:p>
+                      <a:pPr algn="ctr">
+                        <a:defRPr sz="1300">
+                          <a:solidFill>
+                            <a:srgbClr val="1D1D1F"/>
+                          </a:solidFill>
+                        </a:defRPr>
+                      </a:pPr>
+                      <a:r>
+                        <a:t>—</a:t>
+                      </a:r>
+                    </a:p>
+                  </a:txBody>
+                  <a:tcPr/>
+                </a:tc>
+                <a:tc>
+                  <a:txBody>
+                    <a:bodyPr/>
+                    <a:lstStyle/>
+                    <a:p>
+                      <a:pPr algn="ctr">
+                        <a:defRPr sz="1300">
+                          <a:solidFill>
+                            <a:srgbClr val="1D1D1F"/>
+                          </a:solidFill>
+                        </a:defRPr>
+                      </a:pPr>
+                      <a:r>
+                        <a:t>—</a:t>
+                      </a:r>
+                    </a:p>
+                  </a:txBody>
+                  <a:tcPr/>
+                </a:tc>
+                <a:tc>
+                  <a:txBody>
+                    <a:bodyPr/>
+                    <a:lstStyle/>
+                    <a:p>
+                      <a:pPr algn="ctr">
+                        <a:defRPr sz="1300">
+                          <a:solidFill>
+                            <a:srgbClr val="1D1D1F"/>
+                          </a:solidFill>
+                        </a:defRPr>
+                      </a:pPr>
+                      <a:r>
+                        <a:t>—</a:t>
+                      </a:r>
+                    </a:p>
+                  </a:txBody>
+                  <a:tcPr/>
+                </a:tc>
+                <a:tc>
+                  <a:txBody>
+                    <a:bodyPr/>
+                    <a:lstStyle/>
+                    <a:p>
+                      <a:pPr algn="ctr">
+                        <a:defRPr sz="1300">
+                          <a:solidFill>
+                            <a:srgbClr val="1D1D1F"/>
+                          </a:solidFill>
+                        </a:defRPr>
+                      </a:pPr>
+                      <a:r>
+                        <a:t>-0.099</a:t>
+                      </a:r>
+                    </a:p>
+                  </a:txBody>
+                  <a:tcPr/>
+                </a:tc>
+              </a:tr>
+              <a:tr h="548640">
+                <a:tc>
+                  <a:txBody>
+                    <a:bodyPr/>
+                    <a:lstStyle/>
+                    <a:p>
+                      <a:pPr algn="ctr">
+                        <a:defRPr sz="1300">
+                          <a:solidFill>
+                            <a:srgbClr val="1D1D1F"/>
+                          </a:solidFill>
+                        </a:defRPr>
+                      </a:pPr>
+                      <a:r>
+                        <a:t>RMSE (амплитуда, дБ)</a:t>
+                      </a:r>
+                    </a:p>
+                  </a:txBody>
+                  <a:tcPr/>
+                </a:tc>
+                <a:tc>
+                  <a:txBody>
+                    <a:bodyPr/>
+                    <a:lstStyle/>
+                    <a:p>
+                      <a:pPr algn="ctr">
+                        <a:defRPr sz="1300">
+                          <a:solidFill>
+                            <a:srgbClr val="1D1D1F"/>
+                          </a:solidFill>
+                        </a:defRPr>
+                      </a:pPr>
+                      <a:r>
+                        <a:t>—</a:t>
+                      </a:r>
+                    </a:p>
+                  </a:txBody>
+                  <a:tcPr/>
+                </a:tc>
+                <a:tc>
+                  <a:txBody>
+                    <a:bodyPr/>
+                    <a:lstStyle/>
+                    <a:p>
+                      <a:pPr algn="ctr">
+                        <a:defRPr sz="1300">
+                          <a:solidFill>
+                            <a:srgbClr val="1D1D1F"/>
+                          </a:solidFill>
+                        </a:defRPr>
+                      </a:pPr>
+                      <a:r>
+                        <a:t>1.12 дБ</a:t>
+                      </a:r>
+                    </a:p>
+                  </a:txBody>
+                  <a:tcPr/>
+                </a:tc>
+                <a:tc>
+                  <a:txBody>
+                    <a:bodyPr/>
+                    <a:lstStyle/>
+                    <a:p>
+                      <a:pPr algn="ctr">
+                        <a:defRPr sz="1300">
+                          <a:solidFill>
+                            <a:srgbClr val="1D1D1F"/>
+                          </a:solidFill>
+                        </a:defRPr>
+                      </a:pPr>
+                      <a:r>
+                        <a:t>1.25 дБ</a:t>
+                      </a:r>
+                    </a:p>
+                  </a:txBody>
+                  <a:tcPr/>
+                </a:tc>
+                <a:tc>
+                  <a:txBody>
+                    <a:bodyPr/>
+                    <a:lstStyle/>
+                    <a:p>
+                      <a:pPr algn="ctr">
+                        <a:defRPr sz="1300">
+                          <a:solidFill>
+                            <a:srgbClr val="1D1D1F"/>
+                          </a:solidFill>
+                        </a:defRPr>
+                      </a:pPr>
+                      <a:r>
+                        <a:t>1.15 дБ</a:t>
+                      </a:r>
+                    </a:p>
+                  </a:txBody>
+                  <a:tcPr/>
+                </a:tc>
+                <a:tc>
+                  <a:txBody>
+                    <a:bodyPr/>
+                    <a:lstStyle/>
+                    <a:p>
+                      <a:pPr algn="ctr">
+                        <a:defRPr sz="1300">
+                          <a:solidFill>
+                            <a:srgbClr val="1D1D1F"/>
+                          </a:solidFill>
+                        </a:defRPr>
+                      </a:pPr>
+                      <a:r>
+                        <a:t>0.96 дБ</a:t>
+                      </a:r>
+                    </a:p>
+                  </a:txBody>
+                  <a:tcPr/>
+                </a:tc>
+              </a:tr>
+              <a:tr h="548640">
+                <a:tc>
+                  <a:txBody>
+                    <a:bodyPr/>
+                    <a:lstStyle/>
+                    <a:p>
+                      <a:pPr algn="ctr">
+                        <a:defRPr sz="1300">
+                          <a:solidFill>
+                            <a:srgbClr val="1D1D1F"/>
+                          </a:solidFill>
+                        </a:defRPr>
+                      </a:pPr>
+                      <a:r>
+                        <a:t>RMSE (фаза, рад)</a:t>
+                      </a:r>
+                    </a:p>
+                  </a:txBody>
+                  <a:tcPr/>
+                </a:tc>
+                <a:tc>
+                  <a:txBody>
+                    <a:bodyPr/>
+                    <a:lstStyle/>
+                    <a:p>
+                      <a:pPr algn="ctr">
+                        <a:defRPr sz="1300">
+                          <a:solidFill>
+                            <a:srgbClr val="1D1D1F"/>
+                          </a:solidFill>
+                        </a:defRPr>
+                      </a:pPr>
+                      <a:r>
+                        <a:t>—</a:t>
+                      </a:r>
+                    </a:p>
+                  </a:txBody>
+                  <a:tcPr/>
+                </a:tc>
+                <a:tc>
+                  <a:txBody>
+                    <a:bodyPr/>
+                    <a:lstStyle/>
+                    <a:p>
+                      <a:pPr algn="ctr">
+                        <a:defRPr sz="1300">
+                          <a:solidFill>
+                            <a:srgbClr val="1D1D1F"/>
+                          </a:solidFill>
+                        </a:defRPr>
+                      </a:pPr>
+                      <a:r>
+                        <a:t>0.15 рад</a:t>
+                      </a:r>
+                    </a:p>
+                  </a:txBody>
+                  <a:tcPr/>
+                </a:tc>
+                <a:tc>
+                  <a:txBody>
+                    <a:bodyPr/>
+                    <a:lstStyle/>
+                    <a:p>
+                      <a:pPr algn="ctr">
+                        <a:defRPr sz="1300">
+                          <a:solidFill>
+                            <a:srgbClr val="1D1D1F"/>
+                          </a:solidFill>
+                        </a:defRPr>
+                      </a:pPr>
+                      <a:r>
+                        <a:t>0.15 рад</a:t>
+                      </a:r>
+                    </a:p>
+                  </a:txBody>
+                  <a:tcPr/>
+                </a:tc>
+                <a:tc>
+                  <a:txBody>
+                    <a:bodyPr/>
+                    <a:lstStyle/>
+                    <a:p>
+                      <a:pPr algn="ctr">
+                        <a:defRPr sz="1300">
+                          <a:solidFill>
+                            <a:srgbClr val="1D1D1F"/>
+                          </a:solidFill>
+                        </a:defRPr>
+                      </a:pPr>
+                      <a:r>
+                        <a:t>0.15 рад</a:t>
+                      </a:r>
+                    </a:p>
+                  </a:txBody>
+                  <a:tcPr/>
+                </a:tc>
+                <a:tc>
+                  <a:txBody>
+                    <a:bodyPr/>
+                    <a:lstStyle/>
+                    <a:p>
+                      <a:pPr algn="ctr">
+                        <a:defRPr sz="1300">
+                          <a:solidFill>
+                            <a:srgbClr val="1D1D1F"/>
+                          </a:solidFill>
+                        </a:defRPr>
+                      </a:pPr>
+                      <a:r>
+                        <a:t>0.13 рад</a:t>
+                      </a:r>
+                    </a:p>
+                  </a:txBody>
+                  <a:tcPr/>
+                </a:tc>
+              </a:tr>
+            </a:tbl>
+          </a:graphicData>
+        </a:graphic>
+      </p:graphicFrame>
+      <p:sp>
+        <p:nvSpPr>
+          <p:cNvPr id="5" name="TextBox 4"/>
+          <p:cNvSpPr txBox="1"/>
+          <p:nvPr/>
+        </p:nvSpPr>
+        <p:spPr>
+          <a:xfrm>
+            <a:off x="548640" y="5029200"/>
+            <a:ext cx="11094415" cy="1188720"/>
+          </a:xfrm>
+          <a:prstGeom prst="rect">
+            <a:avLst/>
+          </a:prstGeom>
+          <a:noFill/>
+        </p:spPr>
+        <p:txBody>
+          <a:bodyPr wrap="square">
+            <a:spAutoFit/>
+          </a:bodyPr>
+          <a:lstStyle/>
+          <a:p>
+            <a:pPr>
+              <a:defRPr sz="1500" b="1">
+                <a:solidFill>
+                  <a:srgbClr val="0071E3"/>
+                </a:solidFill>
+              </a:defRPr>
+            </a:pPr>
+            <a:r>
+              <a:t>Внедрение фазовой анизотропии τ_par и потерь Друде обеспечило рекордную точность описания амплитуды (0.96 дБ) и фазы (0.13 рад) во всем диапазоне 0.2–2.5 ТГц.</a:t>
+            </a:r>
+          </a:p>
+        </p:txBody>
+      </p:sp>
+    </p:spTree>
+  </p:cSld>
+  <p:clrMapOvr>
+    <a:masterClrMapping/>
+  </p:clrMapOvr>
+</p:sld>
+</file>
+
+<file path=ppt/slides/slide9.xml><?xml version="1.0" encoding="utf-8"?>
+<p:sld xmlns:a="http://schemas.openxmlformats.org/drawingml/2006/main" xmlns:p="http://schemas.openxmlformats.org/presentationml/2006/main" xmlns:r="http://schemas.openxmlformats.org/officeDocument/2006/relationships">
+  <p:cSld>
+    <p:spTree>
+      <p:nvGrpSpPr>
+        <p:cNvPr id="1" name=""/>
+        <p:cNvGrpSpPr/>
+        <p:nvPr/>
+      </p:nvGrpSpPr>
+      <p:grpSpPr/>
+      <p:sp>
+        <p:nvSpPr>
+          <p:cNvPr id="2" name="Rectangle 1"/>
+          <p:cNvSpPr/>
+          <p:nvPr/>
+        </p:nvSpPr>
+        <p:spPr>
+          <a:xfrm>
+            <a:off x="0" y="0"/>
+            <a:ext cx="12191695" cy="6858000"/>
+          </a:xfrm>
+          <a:prstGeom prst="rect">
+            <a:avLst/>
+          </a:prstGeom>
+          <a:solidFill>
+            <a:srgbClr val="F5F5F7"/>
+          </a:solidFill>
+          <a:ln>
+            <a:noFill/>
+          </a:ln>
+        </p:spPr>
+        <p:style>
+          <a:lnRef idx="1">
+            <a:schemeClr val="accent1"/>
+          </a:lnRef>
+          <a:fillRef idx="3">
+            <a:schemeClr val="accent1"/>
+          </a:fillRef>
+          <a:effectRef idx="2">
+            <a:schemeClr val="accent1"/>
+          </a:effectRef>
+          <a:fontRef idx="minor">
+            <a:schemeClr val="lt1"/>
+          </a:fontRef>
+        </p:style>
+        <p:txBody>
+          <a:bodyPr rtlCol="0" anchor="ctr"/>
+          <a:lstStyle/>
+          <a:p>
+            <a:pPr algn="ctr"/>
+          </a:p>
+        </p:txBody>
+      </p:sp>
+      <p:sp>
+        <p:nvSpPr>
+          <p:cNvPr id="3" name="TextBox 2"/>
+          <p:cNvSpPr txBox="1"/>
+          <p:nvPr/>
+        </p:nvSpPr>
+        <p:spPr>
+          <a:xfrm>
+            <a:off x="548640" y="365760"/>
+            <a:ext cx="10972800" cy="914400"/>
+          </a:xfrm>
+          <a:prstGeom prst="rect">
+            <a:avLst/>
+          </a:prstGeom>
+          <a:noFill/>
+        </p:spPr>
+        <p:txBody>
+          <a:bodyPr wrap="square">
+            <a:spAutoFit/>
+          </a:bodyPr>
+          <a:lstStyle/>
+          <a:p>
+            <a:pPr>
+              <a:defRPr sz="2600" b="1">
+                <a:solidFill>
+                  <a:srgbClr val="0071E3"/>
+                </a:solidFill>
+                <a:latin typeface="Helvetica Neue"/>
+              </a:defRPr>
+            </a:pPr>
+            <a:r>
+              <a:t>Ключевые выводы</a:t>
+            </a:r>
+          </a:p>
+          <a:p>
+            <a:pPr>
+              <a:defRPr sz="1300">
+                <a:solidFill>
+                  <a:srgbClr val="86868B"/>
+                </a:solidFill>
+                <a:latin typeface="Helvetica Neue"/>
+              </a:defRPr>
+            </a:pPr>
+            <a:r>
+              <a:t>Итоги работы за неделю</a:t>
+            </a:r>
+          </a:p>
+        </p:txBody>
+      </p:sp>
+      <p:sp>
+        <p:nvSpPr>
+          <p:cNvPr id="4" name="Rounded Rectangle 3"/>
+          <p:cNvSpPr/>
+          <p:nvPr/>
+        </p:nvSpPr>
+        <p:spPr>
+          <a:xfrm>
+            <a:off x="548640" y="1463040"/>
+            <a:ext cx="11094415" cy="1280160"/>
+          </a:xfrm>
+          <a:prstGeom prst="roundRect">
+            <a:avLst/>
+          </a:prstGeom>
+          <a:solidFill>
+            <a:srgbClr val="FFFFFF"/>
+          </a:solidFill>
+          <a:ln>
+            <a:solidFill>
+              <a:srgbClr val="D2D2D7"/>
+            </a:solidFill>
+          </a:ln>
+        </p:spPr>
+        <p:style>
+          <a:lnRef idx="1">
+            <a:schemeClr val="accent1"/>
+          </a:lnRef>
+          <a:fillRef idx="3">
+            <a:schemeClr val="accent1"/>
+          </a:fillRef>
+          <a:effectRef idx="2">
+            <a:schemeClr val="accent1"/>
+          </a:effectRef>
+          <a:fontRef idx="minor">
+            <a:schemeClr val="lt1"/>
+          </a:fontRef>
+        </p:style>
+        <p:txBody>
+          <a:bodyPr rtlCol="0" anchor="ctr" wrap="square"/>
+          <a:lstStyle/>
+          <a:p>
+            <a:pPr algn="ctr">
+              <a:defRPr sz="1800" b="1">
+                <a:solidFill>
+                  <a:srgbClr val="0071E3"/>
+                </a:solidFill>
+                <a:latin typeface="Helvetica Neue"/>
+              </a:defRPr>
+            </a:pPr>
+            <a:r>
+              <a:t>1. Фазовая анизотропия τ_par</a:t>
+            </a:r>
+          </a:p>
+          <a:p>
+            <a:pPr>
+              <a:spcBef>
+                <a:spcPts val="400"/>
+              </a:spcBef>
               <a:defRPr sz="1400">
                 <a:solidFill>
-                  <a:srgbClr val="F8FAFC"/>
-                </a:solidFill>
+                  <a:srgbClr val="1D1D1F"/>
+                </a:solidFill>
+                <a:latin typeface="Helvetica Neue"/>
               </a:defRPr>
             </a:pPr>
             <a:r>
-              <a:t>• FTIR Спектрометрия (Bruker Vertex 70): съем данных в диапазоне &gt; 3 ТГц.</a:t>
+              <a:t>Впервые обнаружен и учтён эффект фазовой задержки TE-моды при скрещивании поляризаторов, что устранило расхождение по фазе при углах &gt; 80°.</a:t>
+            </a:r>
+          </a:p>
+        </p:txBody>
+      </p:sp>
+      <p:sp>
+        <p:nvSpPr>
+          <p:cNvPr id="5" name="Rounded Rectangle 4"/>
+          <p:cNvSpPr/>
+          <p:nvPr/>
+        </p:nvSpPr>
+        <p:spPr>
+          <a:xfrm>
+            <a:off x="548640" y="3017520"/>
+            <a:ext cx="11094415" cy="1280160"/>
+          </a:xfrm>
+          <a:prstGeom prst="roundRect">
+            <a:avLst/>
+          </a:prstGeom>
+          <a:solidFill>
+            <a:srgbClr val="FFFFFF"/>
+          </a:solidFill>
+          <a:ln>
+            <a:solidFill>
+              <a:srgbClr val="D2D2D7"/>
+            </a:solidFill>
+          </a:ln>
+        </p:spPr>
+        <p:style>
+          <a:lnRef idx="1">
+            <a:schemeClr val="accent1"/>
+          </a:lnRef>
+          <a:fillRef idx="3">
+            <a:schemeClr val="accent1"/>
+          </a:fillRef>
+          <a:effectRef idx="2">
+            <a:schemeClr val="accent1"/>
+          </a:effectRef>
+          <a:fontRef idx="minor">
+            <a:schemeClr val="lt1"/>
+          </a:fontRef>
+        </p:style>
+        <p:txBody>
+          <a:bodyPr rtlCol="0" anchor="ctr" wrap="square"/>
+          <a:lstStyle/>
+          <a:p>
+            <a:pPr algn="ctr">
+              <a:defRPr sz="1800" b="1">
+                <a:solidFill>
+                  <a:srgbClr val="0071E3"/>
+                </a:solidFill>
+                <a:latin typeface="Helvetica Neue"/>
+              </a:defRPr>
+            </a:pPr>
+            <a:r>
+              <a:t>2. Закон масштабирования Deff</a:t>
             </a:r>
           </a:p>
           <a:p>
             <a:pPr>
+              <a:spcBef>
+                <a:spcPts val="400"/>
+              </a:spcBef>
               <a:defRPr sz="1400">
                 <a:solidFill>
-                  <a:srgbClr val="F8FAFC"/>
-                </a:solidFill>
+                  <a:srgbClr val="1D1D1F"/>
+                </a:solidFill>
+                <a:latin typeface="Helvetica Neue"/>
               </a:defRPr>
             </a:pPr>
             <a:r>
-              <a:t>• 3D методы (RCWA / FDTD): переподготовка модели для голографических пленок (1200 лин/мм).</a:t>
+              <a:t>Электродинамическое сжатие диаметра нитей подчиняется прямолинейному закону Deff / Dphys = 1 - 0.85 (D/P), проверенному на образцах 15.5/11 и 40/20 мкм.</a:t>
+            </a:r>
+          </a:p>
+        </p:txBody>
+      </p:sp>
+      <p:sp>
+        <p:nvSpPr>
+          <p:cNvPr id="6" name="Rounded Rectangle 5"/>
+          <p:cNvSpPr/>
+          <p:nvPr/>
+        </p:nvSpPr>
+        <p:spPr>
+          <a:xfrm>
+            <a:off x="548640" y="4572000"/>
+            <a:ext cx="11094415" cy="1280160"/>
+          </a:xfrm>
+          <a:prstGeom prst="roundRect">
+            <a:avLst/>
+          </a:prstGeom>
+          <a:solidFill>
+            <a:srgbClr val="FFFFFF"/>
+          </a:solidFill>
+          <a:ln>
+            <a:solidFill>
+              <a:srgbClr val="D2D2D7"/>
+            </a:solidFill>
+          </a:ln>
+        </p:spPr>
+        <p:style>
+          <a:lnRef idx="1">
+            <a:schemeClr val="accent1"/>
+          </a:lnRef>
+          <a:fillRef idx="3">
+            <a:schemeClr val="accent1"/>
+          </a:fillRef>
+          <a:effectRef idx="2">
+            <a:schemeClr val="accent1"/>
+          </a:effectRef>
+          <a:fontRef idx="minor">
+            <a:schemeClr val="lt1"/>
+          </a:fontRef>
+        </p:style>
+        <p:txBody>
+          <a:bodyPr rtlCol="0" anchor="ctr" wrap="square"/>
+          <a:lstStyle/>
+          <a:p>
+            <a:pPr algn="ctr">
+              <a:defRPr sz="1800" b="1">
+                <a:solidFill>
+                  <a:srgbClr val="0071E3"/>
+                </a:solidFill>
+                <a:latin typeface="Helvetica Neue"/>
+              </a:defRPr>
+            </a:pPr>
+            <a:r>
+              <a:t>3. Метрологический предел</a:t>
             </a:r>
           </a:p>
           <a:p>
             <a:pPr>
+              <a:spcBef>
+                <a:spcPts val="400"/>
+              </a:spcBef>
               <a:defRPr sz="1400">
                 <a:solidFill>
-                  <a:srgbClr val="F8FAFC"/>
-                </a:solidFill>
+                  <a:srgbClr val="1D1D1F"/>
+                </a:solidFill>
+                <a:latin typeface="Helvetica Neue"/>
               </a:defRPr>
             </a:pPr>
             <a:r>
-              <a:t>• Журнальная публикация: подготовка статьи по соотношениям Deff(D/P) и анизотропной фазовой задержке.</a:t>
+              <a:t>Опровергнута гипотеза дифракции на оправе (апертура 102 мм &gt;&gt; пучок 12 мм). Точность модели достигла фундаментального предела чувствительности ТГц спектрометра.</a:t>
             </a:r>
           </a:p>
         </p:txBody>

--- a/docs/artifacts/presentation_v2.pptx
+++ b/docs/artifacts/presentation_v2.pptx
@@ -3162,11 +3162,10 @@
           <a:lstStyle/>
           <a:p>
             <a:pPr>
-              <a:defRPr sz="4000" b="1">
+              <a:defRPr sz="3800" b="1">
                 <a:solidFill>
                   <a:srgbClr val="0071E3"/>
                 </a:solidFill>
-                <a:latin typeface="Helvetica Neue"/>
               </a:defRPr>
             </a:pPr>
             <a:r>
@@ -3176,13 +3175,12 @@
           <a:p>
             <a:pPr>
               <a:spcBef>
-                <a:spcPts val="1000"/>
+                <a:spcPts val="800"/>
               </a:spcBef>
-              <a:defRPr sz="2400">
+              <a:defRPr sz="2200">
                 <a:solidFill>
                   <a:srgbClr val="1D1D1F"/>
                 </a:solidFill>
-                <a:latin typeface="Helvetica Neue"/>
               </a:defRPr>
             </a:pPr>
             <a:r>
@@ -3192,11 +3190,10 @@
           <a:p>
             <a:br/>
             <a:pPr>
-              <a:defRPr sz="1600">
+              <a:defRPr sz="1500">
                 <a:solidFill>
                   <a:srgbClr val="86868B"/>
                 </a:solidFill>
-                <a:latin typeface="Helvetica Neue"/>
               </a:defRPr>
             </a:pPr>
             <a:r>
@@ -3274,8 +3271,8 @@
         </p:nvSpPr>
         <p:spPr>
           <a:xfrm>
-            <a:off x="548640" y="365760"/>
-            <a:ext cx="10972800" cy="914400"/>
+            <a:off x="548640" y="320040"/>
+            <a:ext cx="10972800" cy="822960"/>
           </a:xfrm>
           <a:prstGeom prst="rect">
             <a:avLst/>
@@ -3289,7 +3286,7 @@
           <a:lstStyle/>
           <a:p>
             <a:pPr>
-              <a:defRPr sz="2600" b="1">
+              <a:defRPr sz="2400" b="1">
                 <a:solidFill>
                   <a:srgbClr val="0071E3"/>
                 </a:solidFill>
@@ -3302,7 +3299,7 @@
           </a:p>
           <a:p>
             <a:pPr>
-              <a:defRPr sz="1300">
+              <a:defRPr sz="1200">
                 <a:solidFill>
                   <a:srgbClr val="86868B"/>
                 </a:solidFill>
@@ -3323,8 +3320,8 @@
         </p:nvSpPr>
         <p:spPr>
           <a:xfrm>
-            <a:off x="548640" y="1371600"/>
-            <a:ext cx="5303520" cy="4937760"/>
+            <a:off x="548640" y="1234440"/>
+            <a:ext cx="5303520" cy="5120640"/>
           </a:xfrm>
           <a:prstGeom prst="rect">
             <a:avLst/>
@@ -3339,9 +3336,9 @@
           <a:p>
             <a:pPr>
               <a:spcAft>
-                <a:spcPts val="1200"/>
+                <a:spcPts val="800"/>
               </a:spcAft>
-              <a:defRPr sz="1500">
+              <a:defRPr sz="1350">
                 <a:solidFill>
                   <a:srgbClr val="1D1D1F"/>
                 </a:solidFill>
@@ -3349,15 +3346,15 @@
               </a:defRPr>
             </a:pPr>
             <a:r>
-              <a:t>• Устройство: Аттенюатор ATT-11-16-CA85 содержит два проволочных поляризатора P1 (вращается) и P2 (зафиксирован).</a:t>
+              <a:t>• Устройство: Аттенюатор ATT-11-16-CA85 (P1 вращается, P2 фиксирован).</a:t>
             </a:r>
           </a:p>
           <a:p>
             <a:pPr>
               <a:spcAft>
-                <a:spcPts val="1200"/>
+                <a:spcPts val="800"/>
               </a:spcAft>
-              <a:defRPr sz="1500">
+              <a:defRPr sz="1350">
                 <a:solidFill>
                   <a:srgbClr val="1D1D1F"/>
                 </a:solidFill>
@@ -3365,15 +3362,15 @@
               </a:defRPr>
             </a:pPr>
             <a:r>
-              <a:t>• Итог прошлой недели: 6-параметрическая модель (θ_offset = 1.43°, ε_floor = 6.38·10⁻⁵) дала метрологическую погрешность 0.29 дБ.</a:t>
+              <a:t>• Итог прошлой недели: 6-параметрическая модель дала RMSE = 0.29 дБ.</a:t>
             </a:r>
           </a:p>
           <a:p>
             <a:pPr>
               <a:spcAft>
-                <a:spcPts val="1200"/>
+                <a:spcPts val="800"/>
               </a:spcAft>
-              <a:defRPr sz="1500">
+              <a:defRPr sz="1350">
                 <a:solidFill>
                   <a:srgbClr val="1D1D1F"/>
                 </a:solidFill>
@@ -3381,15 +3378,15 @@
               </a:defRPr>
             </a:pPr>
             <a:r>
-              <a:t>• Развитие этой недели:</a:t>
+              <a:t>• Новое развитие этой недели:</a:t>
             </a:r>
           </a:p>
           <a:p>
             <a:pPr>
               <a:spcAft>
-                <a:spcPts val="1200"/>
+                <a:spcPts val="800"/>
               </a:spcAft>
-              <a:defRPr sz="1500">
+              <a:defRPr sz="1350">
                 <a:solidFill>
                   <a:srgbClr val="1D1D1F"/>
                 </a:solidFill>
@@ -3397,15 +3394,15 @@
               </a:defRPr>
             </a:pPr>
             <a:r>
-              <a:t>   - Внедрён импеданс Друде для вольфрамовых нитей.</a:t>
+              <a:t>   - Переход к комплексной аппроксимации (амплитуда + фаза).</a:t>
             </a:r>
           </a:p>
           <a:p>
             <a:pPr>
               <a:spcAft>
-                <a:spcPts val="1200"/>
+                <a:spcPts val="800"/>
               </a:spcAft>
-              <a:defRPr sz="1500">
+              <a:defRPr sz="1350">
                 <a:solidFill>
                   <a:srgbClr val="1D1D1F"/>
                 </a:solidFill>
@@ -3413,15 +3410,31 @@
               </a:defRPr>
             </a:pPr>
             <a:r>
-              <a:t>   - Открыт эффект фазовой анизотропии τ_par при скрещивании.</a:t>
+              <a:t>   - Внедрён импеданс Друде для вольфрамовых нитей.</a:t>
             </a:r>
           </a:p>
           <a:p>
             <a:pPr>
               <a:spcAft>
-                <a:spcPts val="1200"/>
+                <a:spcPts val="800"/>
               </a:spcAft>
-              <a:defRPr sz="1500">
+              <a:defRPr sz="1350">
+                <a:solidFill>
+                  <a:srgbClr val="1D1D1F"/>
+                </a:solidFill>
+                <a:latin typeface="Helvetica Neue"/>
+              </a:defRPr>
+            </a:pPr>
+            <a:r>
+              <a:t>   - Учтена фазовая анизотропия τ_par при скрещивании.</a:t>
+            </a:r>
+          </a:p>
+          <a:p>
+            <a:pPr>
+              <a:spcAft>
+                <a:spcPts val="800"/>
+              </a:spcAft>
+              <a:defRPr sz="1350">
                 <a:solidFill>
                   <a:srgbClr val="1D1D1F"/>
                 </a:solidFill>
@@ -3450,8 +3463,8 @@
         </p:blipFill>
         <p:spPr>
           <a:xfrm>
-            <a:off x="6035040" y="1371600"/>
-            <a:ext cx="6223533" cy="4937760"/>
+            <a:off x="6035040" y="1234440"/>
+            <a:ext cx="6338784" cy="5029200"/>
           </a:xfrm>
           <a:prstGeom prst="rect">
             <a:avLst/>
@@ -3527,8 +3540,8 @@
         </p:nvSpPr>
         <p:spPr>
           <a:xfrm>
-            <a:off x="548640" y="365760"/>
-            <a:ext cx="10972800" cy="914400"/>
+            <a:off x="548640" y="320040"/>
+            <a:ext cx="10972800" cy="822960"/>
           </a:xfrm>
           <a:prstGeom prst="rect">
             <a:avLst/>
@@ -3542,7 +3555,7 @@
           <a:lstStyle/>
           <a:p>
             <a:pPr>
-              <a:defRPr sz="2600" b="1">
+              <a:defRPr sz="2400" b="1">
                 <a:solidFill>
                   <a:srgbClr val="0071E3"/>
                 </a:solidFill>
@@ -3555,7 +3568,7 @@
           </a:p>
           <a:p>
             <a:pPr>
-              <a:defRPr sz="1300">
+              <a:defRPr sz="1200">
                 <a:solidFill>
                   <a:srgbClr val="86868B"/>
                 </a:solidFill>
@@ -3576,8 +3589,8 @@
         </p:nvSpPr>
         <p:spPr>
           <a:xfrm>
-            <a:off x="548640" y="1371600"/>
-            <a:ext cx="5303520" cy="4937760"/>
+            <a:off x="548640" y="1234440"/>
+            <a:ext cx="5303520" cy="5120640"/>
           </a:xfrm>
           <a:prstGeom prst="rect">
             <a:avLst/>
@@ -3592,9 +3605,9 @@
           <a:p>
             <a:pPr>
               <a:spcAft>
-                <a:spcPts val="1200"/>
+                <a:spcPts val="800"/>
               </a:spcAft>
-              <a:defRPr sz="1500">
+              <a:defRPr sz="1350">
                 <a:solidFill>
                   <a:srgbClr val="1D1D1F"/>
                 </a:solidFill>
@@ -3602,15 +3615,15 @@
               </a:defRPr>
             </a:pPr>
             <a:r>
-              <a:t>• Проблема M0 (чистая аналитика): При углах &gt; 50° модель Бланко без потерь дает систематическое завышение сигнала.</a:t>
+              <a:t>• Проблема M0: При углах &gt; 50° чистая аналитика Бланко завышает сигнал.</a:t>
             </a:r>
           </a:p>
           <a:p>
             <a:pPr>
               <a:spcAft>
-                <a:spcPts val="1200"/>
+                <a:spcPts val="800"/>
               </a:spcAft>
-              <a:defRPr sz="1500">
+              <a:defRPr sz="1350">
                 <a:solidFill>
                   <a:srgbClr val="1D1D1F"/>
                 </a:solidFill>
@@ -3618,15 +3631,15 @@
               </a:defRPr>
             </a:pPr>
             <a:r>
-              <a:t>• Учёт проводимости Друде (M1): Введена конечная проводимость вольфрама σ₀ = 1.8·10⁷ См/м.</a:t>
+              <a:t>• Друде (M1): Конечная проводимость вольфрама σ₀ = 1.8·10⁷ См/м снижает уровень.</a:t>
             </a:r>
           </a:p>
           <a:p>
             <a:pPr>
               <a:spcAft>
-                <a:spcPts val="1200"/>
+                <a:spcPts val="800"/>
               </a:spcAft>
-              <a:defRPr sz="1500">
+              <a:defRPr sz="1350">
                 <a:solidFill>
                   <a:srgbClr val="1D1D1F"/>
                 </a:solidFill>
@@ -3634,15 +3647,15 @@
               </a:defRPr>
             </a:pPr>
             <a:r>
-              <a:t>• Учёт рассеяния (M2): Добавлено рэлеевское затухание на шероховатостях exp(-1/2 α ν²).</a:t>
+              <a:t>• Рассеяние (M2): Рэлеевское затухание на шероховатостях (Manabe &amp; Murk, IEEE TAP, 2005).</a:t>
             </a:r>
           </a:p>
           <a:p>
             <a:pPr>
               <a:spcAft>
-                <a:spcPts val="1200"/>
+                <a:spcPts val="800"/>
               </a:spcAft>
-              <a:defRPr sz="1500">
+              <a:defRPr sz="1350">
                 <a:solidFill>
                   <a:srgbClr val="1D1D1F"/>
                 </a:solidFill>
@@ -3650,14 +3663,14 @@
               </a:defRPr>
             </a:pPr>
             <a:r>
-              <a:t>• Результат: Идеальное совпадение теоретического спектра с экспериментом во всём диапазоне.</a:t>
+              <a:t>• Результат: Точное воспроизведение спектра на всех углах в диапазоне 0.2–1.5 ТГц.</a:t>
             </a:r>
           </a:p>
         </p:txBody>
       </p:sp>
       <p:pic>
         <p:nvPicPr>
-          <p:cNvPr id="5" name="Picture 4" descr="model_ablation_comparison.png"/>
+          <p:cNvPr id="5" name="Picture 4" descr="pres_slide3_ablation.png"/>
           <p:cNvPicPr>
             <a:picLocks noChangeAspect="1"/>
           </p:cNvPicPr>
@@ -3671,8 +3684,8 @@
         </p:blipFill>
         <p:spPr>
           <a:xfrm>
-            <a:off x="6035040" y="1371600"/>
-            <a:ext cx="12568844" cy="4937760"/>
+            <a:off x="6035040" y="1234440"/>
+            <a:ext cx="4550229" cy="5029200"/>
           </a:xfrm>
           <a:prstGeom prst="rect">
             <a:avLst/>
@@ -3748,8 +3761,8 @@
         </p:nvSpPr>
         <p:spPr>
           <a:xfrm>
-            <a:off x="548640" y="365760"/>
-            <a:ext cx="10972800" cy="914400"/>
+            <a:off x="548640" y="320040"/>
+            <a:ext cx="10972800" cy="822960"/>
           </a:xfrm>
           <a:prstGeom prst="rect">
             <a:avLst/>
@@ -3763,7 +3776,7 @@
           <a:lstStyle/>
           <a:p>
             <a:pPr>
-              <a:defRPr sz="2600" b="1">
+              <a:defRPr sz="2400" b="1">
                 <a:solidFill>
                   <a:srgbClr val="0071E3"/>
                 </a:solidFill>
@@ -3771,12 +3784,12 @@
               </a:defRPr>
             </a:pPr>
             <a:r>
-              <a:t>Открытие фазовой анизотропии TE-моды (τ_par)</a:t>
+              <a:t>Комплексная аппроксимация и фазовая анизотропия τ_par</a:t>
             </a:r>
           </a:p>
           <a:p>
             <a:pPr>
-              <a:defRPr sz="1300">
+              <a:defRPr sz="1200">
                 <a:solidFill>
                   <a:srgbClr val="86868B"/>
                 </a:solidFill>
@@ -3797,8 +3810,8 @@
         </p:nvSpPr>
         <p:spPr>
           <a:xfrm>
-            <a:off x="548640" y="1371600"/>
-            <a:ext cx="5303520" cy="4937760"/>
+            <a:off x="548640" y="1234440"/>
+            <a:ext cx="5303520" cy="5120640"/>
           </a:xfrm>
           <a:prstGeom prst="rect">
             <a:avLst/>
@@ -3813,9 +3826,9 @@
           <a:p>
             <a:pPr>
               <a:spcAft>
-                <a:spcPts val="1200"/>
+                <a:spcPts val="800"/>
               </a:spcAft>
-              <a:defRPr sz="1500">
+              <a:defRPr sz="1350">
                 <a:solidFill>
                   <a:srgbClr val="1D1D1F"/>
                 </a:solidFill>
@@ -3823,15 +3836,15 @@
               </a:defRPr>
             </a:pPr>
             <a:r>
-              <a:t>• Явление: При углах 80°–90° экспериментальная фаза резко уклонялась от базовой теории.</a:t>
+              <a:t>• Комплексный анализ: Одновременная подгонка |E| и фазы (Castro-Camus, 2012).</a:t>
             </a:r>
           </a:p>
           <a:p>
             <a:pPr>
               <a:spcAft>
-                <a:spcPts val="1200"/>
+                <a:spcPts val="800"/>
               </a:spcAft>
-              <a:defRPr sz="1500">
+              <a:defRPr sz="1350">
                 <a:solidFill>
                   <a:srgbClr val="1D1D1F"/>
                 </a:solidFill>
@@ -3839,15 +3852,15 @@
               </a:defRPr>
             </a:pPr>
             <a:r>
-              <a:t>• Физическая причина: Наведённые токи в нитях решётки создают дополнительную фазовую задержку τ_par для TE-компоненты.</a:t>
+              <a:t>• Физический эффект: На углах 80°–90° TE-мода испытывает фазовую задержку τ_par.</a:t>
             </a:r>
           </a:p>
           <a:p>
             <a:pPr>
               <a:spcAft>
-                <a:spcPts val="1200"/>
+                <a:spcPts val="800"/>
               </a:spcAft>
-              <a:defRPr sz="1500">
+              <a:defRPr sz="1350">
                 <a:solidFill>
                   <a:srgbClr val="1D1D1F"/>
                 </a:solidFill>
@@ -3855,30 +3868,14 @@
               </a:defRPr>
             </a:pPr>
             <a:r>
-              <a:t>• Эффект в модели: Добавление задержки τ_par ≈ -0.1 пс дало точнейшее совпадение фазы.</a:t>
-            </a:r>
-          </a:p>
-          <a:p>
-            <a:pPr>
-              <a:spcAft>
-                <a:spcPts val="1200"/>
-              </a:spcAft>
-              <a:defRPr sz="1500">
-                <a:solidFill>
-                  <a:srgbClr val="1D1D1F"/>
-                </a:solidFill>
-                <a:latin typeface="Helvetica Neue"/>
-              </a:defRPr>
-            </a:pPr>
-            <a:r>
-              <a:t>• Выигрыш по точности: Ошибка фазы снизилась более чем в 5 раз!</a:t>
+              <a:t>• Результат: Учёт τ_par ≈ -0.1 пс снижает ошибку фазы более чем в 5 раз.</a:t>
             </a:r>
           </a:p>
         </p:txBody>
       </p:sp>
       <p:pic>
         <p:nvPicPr>
-          <p:cNvPr id="5" name="Picture 4" descr="phase_anisotropy_proof.png"/>
+          <p:cNvPr id="5" name="Picture 4" descr="pres_slide4_tau_par.png"/>
           <p:cNvPicPr>
             <a:picLocks noChangeAspect="1"/>
           </p:cNvPicPr>
@@ -3892,8 +3889,8 @@
         </p:blipFill>
         <p:spPr>
           <a:xfrm>
-            <a:off x="6035040" y="1371600"/>
-            <a:ext cx="12568844" cy="4937760"/>
+            <a:off x="6035040" y="1234440"/>
+            <a:ext cx="4955888" cy="5029200"/>
           </a:xfrm>
           <a:prstGeom prst="rect">
             <a:avLst/>
@@ -3969,8 +3966,8 @@
         </p:nvSpPr>
         <p:spPr>
           <a:xfrm>
-            <a:off x="548640" y="365760"/>
-            <a:ext cx="10972800" cy="914400"/>
+            <a:off x="548640" y="320040"/>
+            <a:ext cx="10972800" cy="822960"/>
           </a:xfrm>
           <a:prstGeom prst="rect">
             <a:avLst/>
@@ -3984,7 +3981,7 @@
           <a:lstStyle/>
           <a:p>
             <a:pPr>
-              <a:defRPr sz="2600" b="1">
+              <a:defRPr sz="2400" b="1">
                 <a:solidFill>
                   <a:srgbClr val="0071E3"/>
                 </a:solidFill>
@@ -3997,7 +3994,7 @@
           </a:p>
           <a:p>
             <a:pPr>
-              <a:defRPr sz="1300">
+              <a:defRPr sz="1200">
                 <a:solidFill>
                   <a:srgbClr val="86868B"/>
                 </a:solidFill>
@@ -4018,8 +4015,8 @@
         </p:nvSpPr>
         <p:spPr>
           <a:xfrm>
-            <a:off x="548640" y="1371600"/>
-            <a:ext cx="5303520" cy="4937760"/>
+            <a:off x="548640" y="1234440"/>
+            <a:ext cx="5303520" cy="5120640"/>
           </a:xfrm>
           <a:prstGeom prst="rect">
             <a:avLst/>
@@ -4034,9 +4031,9 @@
           <a:p>
             <a:pPr>
               <a:spcAft>
-                <a:spcPts val="1200"/>
+                <a:spcPts val="800"/>
               </a:spcAft>
-              <a:defRPr sz="1500">
+              <a:defRPr sz="1350">
                 <a:solidFill>
                   <a:srgbClr val="1D1D1F"/>
                 </a:solidFill>
@@ -4044,15 +4041,15 @@
               </a:defRPr>
             </a:pPr>
             <a:r>
-              <a:t>• Цель: Проверить применимость модели M3 на поляризаторе с другой геометрией.</a:t>
+              <a:t>• Образец: Период P = 40.0 мкм, нить D = 20.0 мкм (D/P = 0.50).</a:t>
             </a:r>
           </a:p>
           <a:p>
             <a:pPr>
               <a:spcAft>
-                <a:spcPts val="1200"/>
+                <a:spcPts val="800"/>
               </a:spcAft>
-              <a:defRPr sz="1500">
+              <a:defRPr sz="1350">
                 <a:solidFill>
                   <a:srgbClr val="1D1D1F"/>
                 </a:solidFill>
@@ -4060,15 +4057,15 @@
               </a:defRPr>
             </a:pPr>
             <a:r>
-              <a:t>• Параметры образца: Период P = 40.0 мкм, диаметр нитей D = 20.0 мкм (фактор заполнения D/P = 0.50).</a:t>
+              <a:t>• Результаты подгонки M3:</a:t>
             </a:r>
           </a:p>
           <a:p>
             <a:pPr>
               <a:spcAft>
-                <a:spcPts val="1200"/>
+                <a:spcPts val="800"/>
               </a:spcAft>
-              <a:defRPr sz="1500">
+              <a:defRPr sz="1350">
                 <a:solidFill>
                   <a:srgbClr val="1D1D1F"/>
                 </a:solidFill>
@@ -4076,15 +4073,15 @@
               </a:defRPr>
             </a:pPr>
             <a:r>
-              <a:t>• Результаты подгонки:</a:t>
+              <a:t>   - Оффсет юстировки: θ_offset = 0.47°.</a:t>
             </a:r>
           </a:p>
           <a:p>
             <a:pPr>
               <a:spcAft>
-                <a:spcPts val="1200"/>
+                <a:spcPts val="800"/>
               </a:spcAft>
-              <a:defRPr sz="1500">
+              <a:defRPr sz="1350">
                 <a:solidFill>
                   <a:srgbClr val="1D1D1F"/>
                 </a:solidFill>
@@ -4092,15 +4089,15 @@
               </a:defRPr>
             </a:pPr>
             <a:r>
-              <a:t>   - Оффсет юстировки: θ_offset = 0.47°.</a:t>
+              <a:t>   - Извлечённый диаметр: Deff = 11.37 мкм.</a:t>
             </a:r>
           </a:p>
           <a:p>
             <a:pPr>
               <a:spcAft>
-                <a:spcPts val="1200"/>
+                <a:spcPts val="800"/>
               </a:spcAft>
-              <a:defRPr sz="1500">
+              <a:defRPr sz="1350">
                 <a:solidFill>
                   <a:srgbClr val="1D1D1F"/>
                 </a:solidFill>
@@ -4108,15 +4105,15 @@
               </a:defRPr>
             </a:pPr>
             <a:r>
-              <a:t>   - Извлечённый диаметр: Deff = 11.37 мкм.</a:t>
+              <a:t>   - RMSE: 0.96 дБ (амплитуда), 0.24 рад (фаза).</a:t>
             </a:r>
           </a:p>
           <a:p>
             <a:pPr>
               <a:spcAft>
-                <a:spcPts val="1200"/>
+                <a:spcPts val="800"/>
               </a:spcAft>
-              <a:defRPr sz="1500">
+              <a:defRPr sz="1350">
                 <a:solidFill>
                   <a:srgbClr val="1D1D1F"/>
                 </a:solidFill>
@@ -4124,30 +4121,14 @@
               </a:defRPr>
             </a:pPr>
             <a:r>
-              <a:t>   - Ошибка фазы: всего 0.24 рад.</a:t>
-            </a:r>
-          </a:p>
-          <a:p>
-            <a:pPr>
-              <a:spcAft>
-                <a:spcPts val="1200"/>
-              </a:spcAft>
-              <a:defRPr sz="1500">
-                <a:solidFill>
-                  <a:srgbClr val="1D1D1F"/>
-                </a:solidFill>
-                <a:latin typeface="Helvetica Neue"/>
-              </a:defRPr>
-            </a:pPr>
-            <a:r>
-              <a:t>• Вывод: Модель полностью подтверждена!</a:t>
+              <a:t>• Вывод: Модель универсальна для различных геометрий WGP.</a:t>
             </a:r>
           </a:p>
         </p:txBody>
       </p:sp>
       <p:pic>
         <p:nvPicPr>
-          <p:cNvPr id="5" name="Picture 4" descr="analysis_40_20.png"/>
+          <p:cNvPr id="5" name="Picture 4" descr="pres_slide5_validation.png"/>
           <p:cNvPicPr>
             <a:picLocks noChangeAspect="1"/>
           </p:cNvPicPr>
@@ -4161,8 +4142,8 @@
         </p:blipFill>
         <p:spPr>
           <a:xfrm>
-            <a:off x="6035040" y="1371600"/>
-            <a:ext cx="8079971" cy="4937760"/>
+            <a:off x="6035040" y="1234440"/>
+            <a:ext cx="4550229" cy="5029200"/>
           </a:xfrm>
           <a:prstGeom prst="rect">
             <a:avLst/>
@@ -4238,8 +4219,8 @@
         </p:nvSpPr>
         <p:spPr>
           <a:xfrm>
-            <a:off x="548640" y="365760"/>
-            <a:ext cx="10972800" cy="914400"/>
+            <a:off x="548640" y="320040"/>
+            <a:ext cx="10972800" cy="822960"/>
           </a:xfrm>
           <a:prstGeom prst="rect">
             <a:avLst/>
@@ -4253,7 +4234,7 @@
           <a:lstStyle/>
           <a:p>
             <a:pPr>
-              <a:defRPr sz="2600" b="1">
+              <a:defRPr sz="2400" b="1">
                 <a:solidFill>
                   <a:srgbClr val="0071E3"/>
                 </a:solidFill>
@@ -4266,7 +4247,7 @@
           </a:p>
           <a:p>
             <a:pPr>
-              <a:defRPr sz="1300">
+              <a:defRPr sz="1200">
                 <a:solidFill>
                   <a:srgbClr val="86868B"/>
                 </a:solidFill>
@@ -4287,8 +4268,8 @@
         </p:nvSpPr>
         <p:spPr>
           <a:xfrm>
-            <a:off x="548640" y="1371600"/>
-            <a:ext cx="5303520" cy="4937760"/>
+            <a:off x="548640" y="1234440"/>
+            <a:ext cx="5303520" cy="5120640"/>
           </a:xfrm>
           <a:prstGeom prst="rect">
             <a:avLst/>
@@ -4303,9 +4284,9 @@
           <a:p>
             <a:pPr>
               <a:spcAft>
-                <a:spcPts val="1200"/>
+                <a:spcPts val="800"/>
               </a:spcAft>
-              <a:defRPr sz="1500">
+              <a:defRPr sz="1350">
                 <a:solidFill>
                   <a:srgbClr val="1D1D1F"/>
                 </a:solidFill>
@@ -4313,15 +4294,15 @@
               </a:defRPr>
             </a:pPr>
             <a:r>
-              <a:t>• Экспериментальный факт: Действующий диаметр Deff существенно меньше физического Dphys:</a:t>
+              <a:t>• Электродинамическое сжатие: Deff &lt; Dphys из-за перекрытия ближних полей нитей:</a:t>
             </a:r>
           </a:p>
           <a:p>
             <a:pPr>
               <a:spcAft>
-                <a:spcPts val="1200"/>
+                <a:spcPts val="800"/>
               </a:spcAft>
-              <a:defRPr sz="1500">
+              <a:defRPr sz="1350">
                 <a:solidFill>
                   <a:srgbClr val="1D1D1F"/>
                 </a:solidFill>
@@ -4329,15 +4310,15 @@
               </a:defRPr>
             </a:pPr>
             <a:r>
-              <a:t>   - Для 15.5/11 мкм (D/P = 0.71): Deff = 4.4 мкм (Deff/D = 0.40).</a:t>
+              <a:t>   - 15.5/11 мкм (D/P = 0.71): Deff/D = 0.40.</a:t>
             </a:r>
           </a:p>
           <a:p>
             <a:pPr>
               <a:spcAft>
-                <a:spcPts val="1200"/>
+                <a:spcPts val="800"/>
               </a:spcAft>
-              <a:defRPr sz="1500">
+              <a:defRPr sz="1350">
                 <a:solidFill>
                   <a:srgbClr val="1D1D1F"/>
                 </a:solidFill>
@@ -4345,31 +4326,15 @@
               </a:defRPr>
             </a:pPr>
             <a:r>
-              <a:t>   - Для 40/20 мкм (D/P = 0.50): Deff = 11.4 мкм (Deff/D = 0.57).</a:t>
+              <a:t>   - 40/20 мкм (D/P = 0.50): Deff/D = 0.57.</a:t>
             </a:r>
           </a:p>
           <a:p>
             <a:pPr>
               <a:spcAft>
-                <a:spcPts val="1200"/>
+                <a:spcPts val="800"/>
               </a:spcAft>
-              <a:defRPr sz="1500">
-                <a:solidFill>
-                  <a:srgbClr val="1D1D1F"/>
-                </a:solidFill>
-                <a:latin typeface="Helvetica Neue"/>
-              </a:defRPr>
-            </a:pPr>
-            <a:r>
-              <a:t>• Причина: В плотных решётках ближние поля соседних нитей перекрываются.</a:t>
-            </a:r>
-          </a:p>
-          <a:p>
-            <a:pPr>
-              <a:spcAft>
-                <a:spcPts val="1200"/>
-              </a:spcAft>
-              <a:defRPr sz="1500">
+              <a:defRPr sz="1350">
                 <a:solidFill>
                   <a:srgbClr val="1D1D1F"/>
                 </a:solidFill>
@@ -4384,7 +4349,7 @@
       </p:sp>
       <p:pic>
         <p:nvPicPr>
-          <p:cNvPr id="5" name="Picture 4" descr="deff_scaling_law.png"/>
+          <p:cNvPr id="5" name="Picture 4" descr="pres_slide6_deff_law.png"/>
           <p:cNvPicPr>
             <a:picLocks noChangeAspect="1"/>
           </p:cNvPicPr>
@@ -4398,8 +4363,8 @@
         </p:blipFill>
         <p:spPr>
           <a:xfrm>
-            <a:off x="6035040" y="1371600"/>
-            <a:ext cx="7182196" cy="4937760"/>
+            <a:off x="6035040" y="1234440"/>
+            <a:ext cx="6418590" cy="5029200"/>
           </a:xfrm>
           <a:prstGeom prst="rect">
             <a:avLst/>
@@ -4475,8 +4440,8 @@
         </p:nvSpPr>
         <p:spPr>
           <a:xfrm>
-            <a:off x="548640" y="365760"/>
-            <a:ext cx="10972800" cy="914400"/>
+            <a:off x="548640" y="320040"/>
+            <a:ext cx="10972800" cy="822960"/>
           </a:xfrm>
           <a:prstGeom prst="rect">
             <a:avLst/>
@@ -4490,7 +4455,7 @@
           <a:lstStyle/>
           <a:p>
             <a:pPr>
-              <a:defRPr sz="2600" b="1">
+              <a:defRPr sz="2400" b="1">
                 <a:solidFill>
                   <a:srgbClr val="0071E3"/>
                 </a:solidFill>
@@ -4503,7 +4468,7 @@
           </a:p>
           <a:p>
             <a:pPr>
-              <a:defRPr sz="1300">
+              <a:defRPr sz="1200">
                 <a:solidFill>
                   <a:srgbClr val="86868B"/>
                 </a:solidFill>
@@ -4524,8 +4489,8 @@
         </p:nvSpPr>
         <p:spPr>
           <a:xfrm>
-            <a:off x="548640" y="1371600"/>
-            <a:ext cx="5303520" cy="4937760"/>
+            <a:off x="548640" y="1234440"/>
+            <a:ext cx="5303520" cy="5120640"/>
           </a:xfrm>
           <a:prstGeom prst="rect">
             <a:avLst/>
@@ -4540,9 +4505,9 @@
           <a:p>
             <a:pPr>
               <a:spcAft>
-                <a:spcPts val="1200"/>
+                <a:spcPts val="800"/>
               </a:spcAft>
-              <a:defRPr sz="1500">
+              <a:defRPr sz="1350">
                 <a:solidFill>
                   <a:srgbClr val="1D1D1F"/>
                 </a:solidFill>
@@ -4550,15 +4515,15 @@
               </a:defRPr>
             </a:pPr>
             <a:r>
-              <a:t>• Анализ остатков: Разности теории и эксперимента изучены по всем углам и частотам.</a:t>
+              <a:t>• Опровержение краевой дифракции: Апертура оправы (101.6 мм) в 8.5 раз шире пучка (12 мм) — дифракция физически исключена.</a:t>
             </a:r>
           </a:p>
           <a:p>
             <a:pPr>
               <a:spcAft>
-                <a:spcPts val="1200"/>
+                <a:spcPts val="800"/>
               </a:spcAft>
-              <a:defRPr sz="1500">
+              <a:defRPr sz="1350">
                 <a:solidFill>
                   <a:srgbClr val="1D1D1F"/>
                 </a:solidFill>
@@ -4566,15 +4531,15 @@
               </a:defRPr>
             </a:pPr>
             <a:r>
-              <a:t>• Опровержение краевой дифракции: Апертура оправы (101.6 мм) в 8.5 раз шире ТГц пучка (12 мм) — дифракции быть не могло.</a:t>
+              <a:t>• Причина остатков:</a:t>
             </a:r>
           </a:p>
           <a:p>
             <a:pPr>
               <a:spcAft>
-                <a:spcPts val="1200"/>
+                <a:spcPts val="800"/>
               </a:spcAft>
-              <a:defRPr sz="1500">
+              <a:defRPr sz="1350">
                 <a:solidFill>
                   <a:srgbClr val="1D1D1F"/>
                 </a:solidFill>
@@ -4582,15 +4547,15 @@
               </a:defRPr>
             </a:pPr>
             <a:r>
-              <a:t>• Истинная причина невязок:</a:t>
+              <a:t>   1. Динамический предел детектора (&gt;37 дБ при 90°).</a:t>
             </a:r>
           </a:p>
           <a:p>
             <a:pPr>
               <a:spcAft>
-                <a:spcPts val="1200"/>
+                <a:spcPts val="800"/>
               </a:spcAft>
-              <a:defRPr sz="1500">
+              <a:defRPr sz="1350">
                 <a:solidFill>
                   <a:srgbClr val="1D1D1F"/>
                 </a:solidFill>
@@ -4598,15 +4563,15 @@
               </a:defRPr>
             </a:pPr>
             <a:r>
-              <a:t>   1. Предельный динамический диапазон детектора (&gt;37 дБ при 90°).</a:t>
+              <a:t>   2. Дрейф мощности лазера (~2.2%).</a:t>
             </a:r>
           </a:p>
           <a:p>
             <a:pPr>
               <a:spcAft>
-                <a:spcPts val="1200"/>
+                <a:spcPts val="800"/>
               </a:spcAft>
-              <a:defRPr sz="1500">
+              <a:defRPr sz="1350">
                 <a:solidFill>
                   <a:srgbClr val="1D1D1F"/>
                 </a:solidFill>
@@ -4614,23 +4579,7 @@
               </a:defRPr>
             </a:pPr>
             <a:r>
-              <a:t>   2. Естественный дрейф мощности лазера (~2.2%).</a:t>
-            </a:r>
-          </a:p>
-          <a:p>
-            <a:pPr>
-              <a:spcAft>
-                <a:spcPts val="1200"/>
-              </a:spcAft>
-              <a:defRPr sz="1500">
-                <a:solidFill>
-                  <a:srgbClr val="1D1D1F"/>
-                </a:solidFill>
-                <a:latin typeface="Helvetica Neue"/>
-              </a:defRPr>
-            </a:pPr>
-            <a:r>
-              <a:t>• Вывод: Достигнут фундаментальный предел чувствительности спектрометра.</a:t>
+              <a:t>• Вывод: Достигнут предел точности спектрометра.</a:t>
             </a:r>
           </a:p>
         </p:txBody>
@@ -4651,8 +4600,8 @@
         </p:blipFill>
         <p:spPr>
           <a:xfrm>
-            <a:off x="6035040" y="1371600"/>
-            <a:ext cx="6419088" cy="4937760"/>
+            <a:off x="6035040" y="1234440"/>
+            <a:ext cx="6537960" cy="5029200"/>
           </a:xfrm>
           <a:prstGeom prst="rect">
             <a:avLst/>
@@ -4728,8 +4677,8 @@
         </p:nvSpPr>
         <p:spPr>
           <a:xfrm>
-            <a:off x="548640" y="365760"/>
-            <a:ext cx="10972800" cy="914400"/>
+            <a:off x="548640" y="320040"/>
+            <a:ext cx="10972800" cy="822960"/>
           </a:xfrm>
           <a:prstGeom prst="rect">
             <a:avLst/>
@@ -4743,7 +4692,7 @@
           <a:lstStyle/>
           <a:p>
             <a:pPr>
-              <a:defRPr sz="2600" b="1">
+              <a:defRPr sz="2400" b="1">
                 <a:solidFill>
                   <a:srgbClr val="0071E3"/>
                 </a:solidFill>
@@ -4756,7 +4705,7 @@
           </a:p>
           <a:p>
             <a:pPr>
-              <a:defRPr sz="1300">
+              <a:defRPr sz="1200">
                 <a:solidFill>
                   <a:srgbClr val="86868B"/>
                 </a:solidFill>
@@ -4778,7 +4727,7 @@
           <p:nvPr/>
         </p:nvGraphicFramePr>
         <p:xfrm>
-          <a:off x="548640" y="1463040"/>
+          <a:off x="548640" y="1280160"/>
           <a:ext cx="11094415" cy="3291840"/>
         </p:xfrm>
         <a:graphic>
@@ -4832,7 +4781,7 @@
                         </a:defRPr>
                       </a:pPr>
                       <a:r>
-                        <a:t>Номинал (ATT)</a:t>
+                        <a:t>Номинал</a:t>
                       </a:r>
                     </a:p>
                   </a:txBody>
@@ -4942,7 +4891,7 @@
                     <a:lstStyle/>
                     <a:p>
                       <a:pPr algn="ctr">
-                        <a:defRPr sz="1300">
+                        <a:defRPr sz="1250">
                           <a:solidFill>
                             <a:srgbClr val="1D1D1F"/>
                           </a:solidFill>
@@ -4961,7 +4910,7 @@
                     <a:lstStyle/>
                     <a:p>
                       <a:pPr algn="ctr">
-                        <a:defRPr sz="1300">
+                        <a:defRPr sz="1250">
                           <a:solidFill>
                             <a:srgbClr val="1D1D1F"/>
                           </a:solidFill>
@@ -4980,7 +4929,7 @@
                     <a:lstStyle/>
                     <a:p>
                       <a:pPr algn="ctr">
-                        <a:defRPr sz="1300">
+                        <a:defRPr sz="1250">
                           <a:solidFill>
                             <a:srgbClr val="1D1D1F"/>
                           </a:solidFill>
@@ -4999,7 +4948,7 @@
                     <a:lstStyle/>
                     <a:p>
                       <a:pPr algn="ctr">
-                        <a:defRPr sz="1300">
+                        <a:defRPr sz="1250">
                           <a:solidFill>
                             <a:srgbClr val="1D1D1F"/>
                           </a:solidFill>
@@ -5018,7 +4967,7 @@
                     <a:lstStyle/>
                     <a:p>
                       <a:pPr algn="ctr">
-                        <a:defRPr sz="1300">
+                        <a:defRPr sz="1250">
                           <a:solidFill>
                             <a:srgbClr val="1D1D1F"/>
                           </a:solidFill>
@@ -5037,7 +4986,7 @@
                     <a:lstStyle/>
                     <a:p>
                       <a:pPr algn="ctr">
-                        <a:defRPr sz="1300">
+                        <a:defRPr sz="1250">
                           <a:solidFill>
                             <a:srgbClr val="1D1D1F"/>
                           </a:solidFill>
@@ -5058,7 +5007,7 @@
                     <a:lstStyle/>
                     <a:p>
                       <a:pPr algn="ctr">
-                        <a:defRPr sz="1300">
+                        <a:defRPr sz="1250">
                           <a:solidFill>
                             <a:srgbClr val="1D1D1F"/>
                           </a:solidFill>
@@ -5077,7 +5026,7 @@
                     <a:lstStyle/>
                     <a:p>
                       <a:pPr algn="ctr">
-                        <a:defRPr sz="1300">
+                        <a:defRPr sz="1250">
                           <a:solidFill>
                             <a:srgbClr val="1D1D1F"/>
                           </a:solidFill>
@@ -5096,7 +5045,7 @@
                     <a:lstStyle/>
                     <a:p>
                       <a:pPr algn="ctr">
-                        <a:defRPr sz="1300">
+                        <a:defRPr sz="1250">
                           <a:solidFill>
                             <a:srgbClr val="1D1D1F"/>
                           </a:solidFill>
@@ -5115,7 +5064,7 @@
                     <a:lstStyle/>
                     <a:p>
                       <a:pPr algn="ctr">
-                        <a:defRPr sz="1300">
+                        <a:defRPr sz="1250">
                           <a:solidFill>
                             <a:srgbClr val="1D1D1F"/>
                           </a:solidFill>
@@ -5134,7 +5083,7 @@
                     <a:lstStyle/>
                     <a:p>
                       <a:pPr algn="ctr">
-                        <a:defRPr sz="1300">
+                        <a:defRPr sz="1250">
                           <a:solidFill>
                             <a:srgbClr val="1D1D1F"/>
                           </a:solidFill>
@@ -5153,7 +5102,7 @@
                     <a:lstStyle/>
                     <a:p>
                       <a:pPr algn="ctr">
-                        <a:defRPr sz="1300">
+                        <a:defRPr sz="1250">
                           <a:solidFill>
                             <a:srgbClr val="1D1D1F"/>
                           </a:solidFill>
@@ -5174,7 +5123,7 @@
                     <a:lstStyle/>
                     <a:p>
                       <a:pPr algn="ctr">
-                        <a:defRPr sz="1300">
+                        <a:defRPr sz="1250">
                           <a:solidFill>
                             <a:srgbClr val="1D1D1F"/>
                           </a:solidFill>
@@ -5193,7 +5142,7 @@
                     <a:lstStyle/>
                     <a:p>
                       <a:pPr algn="ctr">
-                        <a:defRPr sz="1300">
+                        <a:defRPr sz="1250">
                           <a:solidFill>
                             <a:srgbClr val="1D1D1F"/>
                           </a:solidFill>
@@ -5212,7 +5161,7 @@
                     <a:lstStyle/>
                     <a:p>
                       <a:pPr algn="ctr">
-                        <a:defRPr sz="1300">
+                        <a:defRPr sz="1250">
                           <a:solidFill>
                             <a:srgbClr val="1D1D1F"/>
                           </a:solidFill>
@@ -5231,7 +5180,7 @@
                     <a:lstStyle/>
                     <a:p>
                       <a:pPr algn="ctr">
-                        <a:defRPr sz="1300">
+                        <a:defRPr sz="1250">
                           <a:solidFill>
                             <a:srgbClr val="1D1D1F"/>
                           </a:solidFill>
@@ -5250,7 +5199,7 @@
                     <a:lstStyle/>
                     <a:p>
                       <a:pPr algn="ctr">
-                        <a:defRPr sz="1300">
+                        <a:defRPr sz="1250">
                           <a:solidFill>
                             <a:srgbClr val="1D1D1F"/>
                           </a:solidFill>
@@ -5269,7 +5218,7 @@
                     <a:lstStyle/>
                     <a:p>
                       <a:pPr algn="ctr">
-                        <a:defRPr sz="1300">
+                        <a:defRPr sz="1250">
                           <a:solidFill>
                             <a:srgbClr val="1D1D1F"/>
                           </a:solidFill>
@@ -5290,14 +5239,14 @@
                     <a:lstStyle/>
                     <a:p>
                       <a:pPr algn="ctr">
-                        <a:defRPr sz="1300">
+                        <a:defRPr sz="1250">
                           <a:solidFill>
                             <a:srgbClr val="1D1D1F"/>
                           </a:solidFill>
                         </a:defRPr>
                       </a:pPr>
                       <a:r>
-                        <a:t>RMSE (амплитуда, дБ)</a:t>
+                        <a:t>RMSE (амплитуда)</a:t>
                       </a:r>
                     </a:p>
                   </a:txBody>
@@ -5309,7 +5258,7 @@
                     <a:lstStyle/>
                     <a:p>
                       <a:pPr algn="ctr">
-                        <a:defRPr sz="1300">
+                        <a:defRPr sz="1250">
                           <a:solidFill>
                             <a:srgbClr val="1D1D1F"/>
                           </a:solidFill>
@@ -5328,7 +5277,7 @@
                     <a:lstStyle/>
                     <a:p>
                       <a:pPr algn="ctr">
-                        <a:defRPr sz="1300">
+                        <a:defRPr sz="1250">
                           <a:solidFill>
                             <a:srgbClr val="1D1D1F"/>
                           </a:solidFill>
@@ -5347,7 +5296,7 @@
                     <a:lstStyle/>
                     <a:p>
                       <a:pPr algn="ctr">
-                        <a:defRPr sz="1300">
+                        <a:defRPr sz="1250">
                           <a:solidFill>
                             <a:srgbClr val="1D1D1F"/>
                           </a:solidFill>
@@ -5366,7 +5315,7 @@
                     <a:lstStyle/>
                     <a:p>
                       <a:pPr algn="ctr">
-                        <a:defRPr sz="1300">
+                        <a:defRPr sz="1250">
                           <a:solidFill>
                             <a:srgbClr val="1D1D1F"/>
                           </a:solidFill>
@@ -5385,7 +5334,7 @@
                     <a:lstStyle/>
                     <a:p>
                       <a:pPr algn="ctr">
-                        <a:defRPr sz="1300">
+                        <a:defRPr sz="1250">
                           <a:solidFill>
                             <a:srgbClr val="1D1D1F"/>
                           </a:solidFill>
@@ -5406,14 +5355,14 @@
                     <a:lstStyle/>
                     <a:p>
                       <a:pPr algn="ctr">
-                        <a:defRPr sz="1300">
+                        <a:defRPr sz="1250">
                           <a:solidFill>
                             <a:srgbClr val="1D1D1F"/>
                           </a:solidFill>
                         </a:defRPr>
                       </a:pPr>
                       <a:r>
-                        <a:t>RMSE (фаза, рад)</a:t>
+                        <a:t>RMSE (фаза)</a:t>
                       </a:r>
                     </a:p>
                   </a:txBody>
@@ -5425,7 +5374,7 @@
                     <a:lstStyle/>
                     <a:p>
                       <a:pPr algn="ctr">
-                        <a:defRPr sz="1300">
+                        <a:defRPr sz="1250">
                           <a:solidFill>
                             <a:srgbClr val="1D1D1F"/>
                           </a:solidFill>
@@ -5444,7 +5393,7 @@
                     <a:lstStyle/>
                     <a:p>
                       <a:pPr algn="ctr">
-                        <a:defRPr sz="1300">
+                        <a:defRPr sz="1250">
                           <a:solidFill>
                             <a:srgbClr val="1D1D1F"/>
                           </a:solidFill>
@@ -5463,7 +5412,7 @@
                     <a:lstStyle/>
                     <a:p>
                       <a:pPr algn="ctr">
-                        <a:defRPr sz="1300">
+                        <a:defRPr sz="1250">
                           <a:solidFill>
                             <a:srgbClr val="1D1D1F"/>
                           </a:solidFill>
@@ -5482,7 +5431,7 @@
                     <a:lstStyle/>
                     <a:p>
                       <a:pPr algn="ctr">
-                        <a:defRPr sz="1300">
+                        <a:defRPr sz="1250">
                           <a:solidFill>
                             <a:srgbClr val="1D1D1F"/>
                           </a:solidFill>
@@ -5501,7 +5450,7 @@
                     <a:lstStyle/>
                     <a:p>
                       <a:pPr algn="ctr">
-                        <a:defRPr sz="1300">
+                        <a:defRPr sz="1250">
                           <a:solidFill>
                             <a:srgbClr val="1D1D1F"/>
                           </a:solidFill>
@@ -5527,8 +5476,8 @@
         </p:nvSpPr>
         <p:spPr>
           <a:xfrm>
-            <a:off x="548640" y="5029200"/>
-            <a:ext cx="11094415" cy="1188720"/>
+            <a:off x="548640" y="4846320"/>
+            <a:ext cx="11094415" cy="1097280"/>
           </a:xfrm>
           <a:prstGeom prst="rect">
             <a:avLst/>
@@ -5542,14 +5491,14 @@
           <a:lstStyle/>
           <a:p>
             <a:pPr>
-              <a:defRPr sz="1500" b="1">
+              <a:defRPr sz="1400" b="1">
                 <a:solidFill>
                   <a:srgbClr val="0071E3"/>
                 </a:solidFill>
               </a:defRPr>
             </a:pPr>
             <a:r>
-              <a:t>Внедрение фазовой анизотропии τ_par и потерь Друде обеспечило рекордную точность описания амплитуды (0.96 дБ) и фазы (0.13 рад) во всем диапазоне 0.2–2.5 ТГц.</a:t>
+              <a:t>Учёт фазовой анизотропии τ_par и потерь Друде обеспечил рекордную точность описания амплитуды (0.96 дБ) и фазы (0.13 рад) в диапазоне 0.2–1.5 ТГц.</a:t>
             </a:r>
           </a:p>
         </p:txBody>
@@ -5623,8 +5572,8 @@
         </p:nvSpPr>
         <p:spPr>
           <a:xfrm>
-            <a:off x="548640" y="365760"/>
-            <a:ext cx="10972800" cy="914400"/>
+            <a:off x="548640" y="320040"/>
+            <a:ext cx="10972800" cy="822960"/>
           </a:xfrm>
           <a:prstGeom prst="rect">
             <a:avLst/>
@@ -5638,7 +5587,7 @@
           <a:lstStyle/>
           <a:p>
             <a:pPr>
-              <a:defRPr sz="2600" b="1">
+              <a:defRPr sz="2400" b="1">
                 <a:solidFill>
                   <a:srgbClr val="0071E3"/>
                 </a:solidFill>
@@ -5651,7 +5600,7 @@
           </a:p>
           <a:p>
             <a:pPr>
-              <a:defRPr sz="1300">
+              <a:defRPr sz="1200">
                 <a:solidFill>
                   <a:srgbClr val="86868B"/>
                 </a:solidFill>
@@ -5672,8 +5621,8 @@
         </p:nvSpPr>
         <p:spPr>
           <a:xfrm>
-            <a:off x="548640" y="1463040"/>
-            <a:ext cx="11094415" cy="1280160"/>
+            <a:off x="548640" y="1280160"/>
+            <a:ext cx="11094415" cy="1234440"/>
           </a:xfrm>
           <a:prstGeom prst="roundRect">
             <a:avLst/>
@@ -5706,31 +5655,29 @@
           <a:lstStyle/>
           <a:p>
             <a:pPr algn="ctr">
-              <a:defRPr sz="1800" b="1">
+              <a:defRPr sz="1600" b="1">
                 <a:solidFill>
                   <a:srgbClr val="0071E3"/>
                 </a:solidFill>
-                <a:latin typeface="Helvetica Neue"/>
               </a:defRPr>
             </a:pPr>
             <a:r>
-              <a:t>1. Фазовая анизотропия τ_par</a:t>
+              <a:t>1. Комплексная аппроксимация и τ_par</a:t>
             </a:r>
           </a:p>
           <a:p>
             <a:pPr>
               <a:spcBef>
-                <a:spcPts val="400"/>
+                <a:spcPts val="300"/>
               </a:spcBef>
-              <a:defRPr sz="1400">
+              <a:defRPr sz="1300">
                 <a:solidFill>
                   <a:srgbClr val="1D1D1F"/>
                 </a:solidFill>
-                <a:latin typeface="Helvetica Neue"/>
               </a:defRPr>
             </a:pPr>
             <a:r>
-              <a:t>Впервые обнаружен и учтён эффект фазовой задержки TE-моды при скрещивании поляризаторов, что устранило расхождение по фазе при углах &gt; 80°.</a:t>
+              <a:t>Впервые учтена фазовая задержка TE-моды при скрещивании поляризаторов, что устранило расхождение фазы при углах &gt; 80°.</a:t>
             </a:r>
           </a:p>
         </p:txBody>
@@ -5743,8 +5690,8 @@
         </p:nvSpPr>
         <p:spPr>
           <a:xfrm>
-            <a:off x="548640" y="3017520"/>
-            <a:ext cx="11094415" cy="1280160"/>
+            <a:off x="548640" y="2743200"/>
+            <a:ext cx="11094415" cy="1234440"/>
           </a:xfrm>
           <a:prstGeom prst="roundRect">
             <a:avLst/>
@@ -5777,11 +5724,10 @@
           <a:lstStyle/>
           <a:p>
             <a:pPr algn="ctr">
-              <a:defRPr sz="1800" b="1">
+              <a:defRPr sz="1600" b="1">
                 <a:solidFill>
                   <a:srgbClr val="0071E3"/>
                 </a:solidFill>
-                <a:latin typeface="Helvetica Neue"/>
               </a:defRPr>
             </a:pPr>
             <a:r>
@@ -5791,17 +5737,16 @@
           <a:p>
             <a:pPr>
               <a:spcBef>
-                <a:spcPts val="400"/>
+                <a:spcPts val="300"/>
               </a:spcBef>
-              <a:defRPr sz="1400">
+              <a:defRPr sz="1300">
                 <a:solidFill>
                   <a:srgbClr val="1D1D1F"/>
                 </a:solidFill>
-                <a:latin typeface="Helvetica Neue"/>
               </a:defRPr>
             </a:pPr>
             <a:r>
-              <a:t>Электродинамическое сжатие диаметра нитей подчиняется прямолинейному закону Deff / Dphys = 1 - 0.85 (D/P), проверенному на образцах 15.5/11 и 40/20 мкм.</a:t>
+              <a:t>Выведено прямолинейное соотношение Deff / Dphys = 1 - 0.85 (D/P), подтверждённое на образцах 15.5/11 и 40/20 мкм.</a:t>
             </a:r>
           </a:p>
         </p:txBody>
@@ -5814,8 +5759,8 @@
         </p:nvSpPr>
         <p:spPr>
           <a:xfrm>
-            <a:off x="548640" y="4572000"/>
-            <a:ext cx="11094415" cy="1280160"/>
+            <a:off x="548640" y="4206240"/>
+            <a:ext cx="11094415" cy="1234440"/>
           </a:xfrm>
           <a:prstGeom prst="roundRect">
             <a:avLst/>
@@ -5848,11 +5793,10 @@
           <a:lstStyle/>
           <a:p>
             <a:pPr algn="ctr">
-              <a:defRPr sz="1800" b="1">
+              <a:defRPr sz="1600" b="1">
                 <a:solidFill>
                   <a:srgbClr val="0071E3"/>
                 </a:solidFill>
-                <a:latin typeface="Helvetica Neue"/>
               </a:defRPr>
             </a:pPr>
             <a:r>
@@ -5862,17 +5806,16 @@
           <a:p>
             <a:pPr>
               <a:spcBef>
-                <a:spcPts val="400"/>
+                <a:spcPts val="300"/>
               </a:spcBef>
-              <a:defRPr sz="1400">
+              <a:defRPr sz="1300">
                 <a:solidFill>
                   <a:srgbClr val="1D1D1F"/>
                 </a:solidFill>
-                <a:latin typeface="Helvetica Neue"/>
               </a:defRPr>
             </a:pPr>
             <a:r>
-              <a:t>Опровергнута гипотеза дифракции на оправе (апертура 102 мм &gt;&gt; пучок 12 мм). Точность модели достигла фундаментального предела чувствительности ТГц спектрометра.</a:t>
+              <a:t>Исключена гипотеза дифракции на оправе (апертура 102 мм &gt;&gt; пучок 12 мм). Модель достигла фундаментального предела чувствительности ТГц спектрометра.</a:t>
             </a:r>
           </a:p>
         </p:txBody>
